--- a/docs/business/SafeRise-Investor-Deck.pptx
+++ b/docs/business/SafeRise-Investor-Deck.pptx
@@ -9092,7 +9092,7 @@
                 <a:ea typeface="Cambria" pitchFamily="34" charset="-122"/>
                 <a:cs typeface="Cambria" pitchFamily="34" charset="-120"/>
               </a:rPr>
-              <a:t>Track 01 free · €19 / month, €190 / year</a:t>
+              <a:t>Track 01 free · €19 Tracks 02–04 · €29 all eight</a:t>
             </a:r>
             <a:endParaRPr lang="en-US" sz="1400" dirty="0"/>
           </a:p>
@@ -9134,7 +9134,7 @@
                 <a:ea typeface="Calibri" pitchFamily="34" charset="-122"/>
                 <a:cs typeface="Calibri" pitchFamily="34" charset="-120"/>
               </a:rPr>
-              <a:t>Opens every other track, and every track added after</a:t>
+              <a:t>Annual at ten months — €190 and €290. Adding a track inside a tier never costs more</a:t>
             </a:r>
             <a:endParaRPr lang="en-US" sz="1100" dirty="0"/>
           </a:p>
@@ -9809,7 +9809,7 @@
                 <a:ea typeface="Calibri" pitchFamily="34" charset="-122"/>
                 <a:cs typeface="Calibri" pitchFamily="34" charset="-120"/>
               </a:rPr>
-              <a:t>Banded by headcount, waterfall tiered. Never by usage</a:t>
+              <a:t>By size of organisation, waterfall tiered. Never by usage</a:t>
             </a:r>
             <a:endParaRPr lang="en-US" sz="1100" dirty="0"/>
           </a:p>
@@ -9932,7 +9932,7 @@
                 <a:ea typeface="Calibri" pitchFamily="34" charset="-122"/>
                 <a:cs typeface="Calibri" pitchFamily="34" charset="-120"/>
               </a:rPr>
-              <a:t>A €29 premium consumer tier is under consideration as the library grows. Not live, not forecast.</a:t>
+              <a:t>The €29 tier opens as the library doubles in month four, at €290 a year.</a:t>
             </a:r>
             <a:endParaRPr lang="en-US" sz="1050" dirty="0"/>
           </a:p>
@@ -15164,7 +15164,7 @@
                 <a:ea typeface="Cambria" pitchFamily="34" charset="-122"/>
                 <a:cs typeface="Cambria" pitchFamily="34" charset="-120"/>
               </a:rPr>
-              <a:t>Free at the door. Recurring at the end.</a:t>
+              <a:t>Paid from the first room.</a:t>
             </a:r>
             <a:endParaRPr lang="en-US" sz="3400" dirty="0"/>
           </a:p>
@@ -15172,7 +15172,7 @@
       </p:sp>
       <p:sp>
         <p:nvSpPr>
-          <p:cNvPr id="4" name="Shape 2"/>
+          <p:cNvPr id="9" name="Shape 7"/>
           <p:cNvSpPr/>
           <p:nvPr/>
         </p:nvSpPr>
@@ -15199,7 +15199,7 @@
       </p:sp>
       <p:sp>
         <p:nvSpPr>
-          <p:cNvPr id="5" name="Text 3"/>
+          <p:cNvPr id="10" name="Text 8"/>
           <p:cNvSpPr txBox="1"/>
           <p:nvPr/>
         </p:nvSpPr>
@@ -15230,7 +15230,7 @@
                 <a:ea typeface="Cambria" pitchFamily="34" charset="-122"/>
                 <a:cs typeface="Cambria" pitchFamily="34" charset="-120"/>
               </a:rPr>
-              <a:t>0</a:t>
+              <a:t>1</a:t>
             </a:r>
             <a:endParaRPr lang="en-US" sz="1700" dirty="0"/>
           </a:p>
@@ -15238,7 +15238,7 @@
       </p:sp>
       <p:sp>
         <p:nvSpPr>
-          <p:cNvPr id="6" name="Text 4"/>
+          <p:cNvPr id="11" name="Text 9"/>
           <p:cNvSpPr txBox="1"/>
           <p:nvPr/>
         </p:nvSpPr>
@@ -15269,7 +15269,7 @@
                 <a:ea typeface="Cambria" pitchFamily="34" charset="-122"/>
                 <a:cs typeface="Cambria" pitchFamily="34" charset="-120"/>
               </a:rPr>
-              <a:t>Lunch-and-learn, 45 min</a:t>
+              <a:t>Organisation workshop</a:t>
             </a:r>
             <a:endParaRPr lang="en-US" sz="1500" dirty="0"/>
           </a:p>
@@ -15277,7 +15277,7 @@
       </p:sp>
       <p:sp>
         <p:nvSpPr>
-          <p:cNvPr id="7" name="Text 5"/>
+          <p:cNvPr id="12" name="Text 10"/>
           <p:cNvSpPr txBox="1"/>
           <p:nvPr/>
         </p:nvSpPr>
@@ -15308,7 +15308,7 @@
                 <a:ea typeface="Calibri" pitchFamily="34" charset="-122"/>
                 <a:cs typeface="Calibri" pitchFamily="34" charset="-120"/>
               </a:rPr>
-              <a:t>Free</a:t>
+              <a:t>€1,800</a:t>
             </a:r>
             <a:endParaRPr lang="en-US" sz="1250" dirty="0"/>
           </a:p>
@@ -15316,7 +15316,7 @@
       </p:sp>
       <p:sp>
         <p:nvSpPr>
-          <p:cNvPr id="8" name="Text 6"/>
+          <p:cNvPr id="13" name="Text 11"/>
           <p:cNvSpPr txBox="1"/>
           <p:nvPr/>
         </p:nvSpPr>
@@ -15350,7 +15350,7 @@
                 <a:ea typeface="Calibri" pitchFamily="34" charset="-122"/>
                 <a:cs typeface="Calibri" pitchFamily="34" charset="-120"/>
               </a:rPr>
-              <a:t>The entry. Costs an afternoon, needs no track record</a:t>
+              <a:t>The entry, and the first paid engagement</a:t>
             </a:r>
             <a:endParaRPr lang="en-US" sz="1050" dirty="0"/>
           </a:p>
@@ -15358,7 +15358,7 @@
       </p:sp>
       <p:sp>
         <p:nvSpPr>
-          <p:cNvPr id="9" name="Shape 7"/>
+          <p:cNvPr id="14" name="Shape 12"/>
           <p:cNvSpPr/>
           <p:nvPr/>
         </p:nvSpPr>
@@ -15385,7 +15385,7 @@
       </p:sp>
       <p:sp>
         <p:nvSpPr>
-          <p:cNvPr id="10" name="Text 8"/>
+          <p:cNvPr id="15" name="Text 13"/>
           <p:cNvSpPr txBox="1"/>
           <p:nvPr/>
         </p:nvSpPr>
@@ -15416,7 +15416,7 @@
                 <a:ea typeface="Cambria" pitchFamily="34" charset="-122"/>
                 <a:cs typeface="Cambria" pitchFamily="34" charset="-120"/>
               </a:rPr>
-              <a:t>1</a:t>
+              <a:t>2</a:t>
             </a:r>
             <a:endParaRPr lang="en-US" sz="1700" dirty="0"/>
           </a:p>
@@ -15424,7 +15424,7 @@
       </p:sp>
       <p:sp>
         <p:nvSpPr>
-          <p:cNvPr id="11" name="Text 9"/>
+          <p:cNvPr id="16" name="Text 14"/>
           <p:cNvSpPr txBox="1"/>
           <p:nvPr/>
         </p:nvSpPr>
@@ -15455,7 +15455,7 @@
                 <a:ea typeface="Cambria" pitchFamily="34" charset="-122"/>
                 <a:cs typeface="Cambria" pitchFamily="34" charset="-120"/>
               </a:rPr>
-              <a:t>Organisation workshop</a:t>
+              <a:t>Half-day retreat</a:t>
             </a:r>
             <a:endParaRPr lang="en-US" sz="1500" dirty="0"/>
           </a:p>
@@ -15463,7 +15463,7 @@
       </p:sp>
       <p:sp>
         <p:nvSpPr>
-          <p:cNvPr id="12" name="Text 10"/>
+          <p:cNvPr id="17" name="Text 15"/>
           <p:cNvSpPr txBox="1"/>
           <p:nvPr/>
         </p:nvSpPr>
@@ -15494,7 +15494,7 @@
                 <a:ea typeface="Calibri" pitchFamily="34" charset="-122"/>
                 <a:cs typeface="Calibri" pitchFamily="34" charset="-120"/>
               </a:rPr>
-              <a:t>€1,800</a:t>
+              <a:t>€2,400 · €3,500 · scoped</a:t>
             </a:r>
             <a:endParaRPr lang="en-US" sz="1250" dirty="0"/>
           </a:p>
@@ -15502,7 +15502,7 @@
       </p:sp>
       <p:sp>
         <p:nvSpPr>
-          <p:cNvPr id="13" name="Text 11"/>
+          <p:cNvPr id="18" name="Text 16"/>
           <p:cNvSpPr txBox="1"/>
           <p:nvPr/>
         </p:nvSpPr>
@@ -15536,7 +15536,7 @@
                 <a:ea typeface="Calibri" pitchFamily="34" charset="-122"/>
                 <a:cs typeface="Calibri" pitchFamily="34" charset="-120"/>
               </a:rPr>
-              <a:t>First paid engagement</a:t>
+              <a:t>To 50 · 51–120 · above 120 scoped</a:t>
             </a:r>
             <a:endParaRPr lang="en-US" sz="1050" dirty="0"/>
           </a:p>
@@ -15544,7 +15544,7 @@
       </p:sp>
       <p:sp>
         <p:nvSpPr>
-          <p:cNvPr id="14" name="Shape 12"/>
+          <p:cNvPr id="19" name="Shape 17"/>
           <p:cNvSpPr/>
           <p:nvPr/>
         </p:nvSpPr>
@@ -15571,7 +15571,7 @@
       </p:sp>
       <p:sp>
         <p:nvSpPr>
-          <p:cNvPr id="15" name="Text 13"/>
+          <p:cNvPr id="20" name="Text 18"/>
           <p:cNvSpPr txBox="1"/>
           <p:nvPr/>
         </p:nvSpPr>
@@ -15602,7 +15602,7 @@
                 <a:ea typeface="Cambria" pitchFamily="34" charset="-122"/>
                 <a:cs typeface="Cambria" pitchFamily="34" charset="-120"/>
               </a:rPr>
-              <a:t>2</a:t>
+              <a:t>3</a:t>
             </a:r>
             <a:endParaRPr lang="en-US" sz="1700" dirty="0"/>
           </a:p>
@@ -15610,7 +15610,7 @@
       </p:sp>
       <p:sp>
         <p:nvSpPr>
-          <p:cNvPr id="16" name="Text 14"/>
+          <p:cNvPr id="21" name="Text 19"/>
           <p:cNvSpPr txBox="1"/>
           <p:nvPr/>
         </p:nvSpPr>
@@ -15641,7 +15641,7 @@
                 <a:ea typeface="Cambria" pitchFamily="34" charset="-122"/>
                 <a:cs typeface="Cambria" pitchFamily="34" charset="-120"/>
               </a:rPr>
-              <a:t>Half-day retreat</a:t>
+              <a:t>Annual access, all staff</a:t>
             </a:r>
             <a:endParaRPr lang="en-US" sz="1500" dirty="0"/>
           </a:p>
@@ -15649,7 +15649,7 @@
       </p:sp>
       <p:sp>
         <p:nvSpPr>
-          <p:cNvPr id="17" name="Text 15"/>
+          <p:cNvPr id="22" name="Text 20"/>
           <p:cNvSpPr txBox="1"/>
           <p:nvPr/>
         </p:nvSpPr>
@@ -15680,7 +15680,7 @@
                 <a:ea typeface="Calibri" pitchFamily="34" charset="-122"/>
                 <a:cs typeface="Calibri" pitchFamily="34" charset="-120"/>
               </a:rPr>
-              <a:t>€1,800 / €3,500</a:t>
+              <a:t>By size of organisation</a:t>
             </a:r>
             <a:endParaRPr lang="en-US" sz="1250" dirty="0"/>
           </a:p>
@@ -15688,7 +15688,7 @@
       </p:sp>
       <p:sp>
         <p:nvSpPr>
-          <p:cNvPr id="18" name="Text 16"/>
+          <p:cNvPr id="23" name="Text 21"/>
           <p:cNvSpPr txBox="1"/>
           <p:nvPr/>
         </p:nvSpPr>
@@ -15722,7 +15722,7 @@
                 <a:ea typeface="Calibri" pitchFamily="34" charset="-122"/>
                 <a:cs typeface="Calibri" pitchFamily="34" charset="-120"/>
               </a:rPr>
-              <a:t>The core offer, banded by size</a:t>
+              <a:t>Waterfall tiered. The recurring line — never priced per seat</a:t>
             </a:r>
             <a:endParaRPr lang="en-US" sz="1050" dirty="0"/>
           </a:p>
@@ -15730,7 +15730,7 @@
       </p:sp>
       <p:sp>
         <p:nvSpPr>
-          <p:cNvPr id="19" name="Shape 17"/>
+          <p:cNvPr id="24" name="Shape 22"/>
           <p:cNvSpPr/>
           <p:nvPr/>
         </p:nvSpPr>
@@ -15757,7 +15757,7 @@
       </p:sp>
       <p:sp>
         <p:nvSpPr>
-          <p:cNvPr id="20" name="Text 18"/>
+          <p:cNvPr id="25" name="Text 23"/>
           <p:cNvSpPr txBox="1"/>
           <p:nvPr/>
         </p:nvSpPr>
@@ -15788,7 +15788,7 @@
                 <a:ea typeface="Cambria" pitchFamily="34" charset="-122"/>
                 <a:cs typeface="Cambria" pitchFamily="34" charset="-120"/>
               </a:rPr>
-              <a:t>3</a:t>
+              <a:t>4</a:t>
             </a:r>
             <a:endParaRPr lang="en-US" sz="1700" dirty="0"/>
           </a:p>
@@ -15796,7 +15796,7 @@
       </p:sp>
       <p:sp>
         <p:nvSpPr>
-          <p:cNvPr id="21" name="Text 19"/>
+          <p:cNvPr id="26" name="Text 24"/>
           <p:cNvSpPr txBox="1"/>
           <p:nvPr/>
         </p:nvSpPr>
@@ -15827,7 +15827,7 @@
                 <a:ea typeface="Cambria" pitchFamily="34" charset="-122"/>
                 <a:cs typeface="Cambria" pitchFamily="34" charset="-120"/>
               </a:rPr>
-              <a:t>Annual access, all staff</a:t>
+              <a:t>Conference, festival, event</a:t>
             </a:r>
             <a:endParaRPr lang="en-US" sz="1500" dirty="0"/>
           </a:p>
@@ -15835,7 +15835,7 @@
       </p:sp>
       <p:sp>
         <p:nvSpPr>
-          <p:cNvPr id="22" name="Text 20"/>
+          <p:cNvPr id="27" name="Text 25"/>
           <p:cNvSpPr txBox="1"/>
           <p:nvPr/>
         </p:nvSpPr>
@@ -15866,7 +15866,7 @@
                 <a:ea typeface="Calibri" pitchFamily="34" charset="-122"/>
                 <a:cs typeface="Calibri" pitchFamily="34" charset="-120"/>
               </a:rPr>
-              <a:t>Banded by headcount</a:t>
+              <a:t>Custom</a:t>
             </a:r>
             <a:endParaRPr lang="en-US" sz="1250" dirty="0"/>
           </a:p>
@@ -15874,7 +15874,7 @@
       </p:sp>
       <p:sp>
         <p:nvSpPr>
-          <p:cNvPr id="23" name="Text 21"/>
+          <p:cNvPr id="28" name="Text 26"/>
           <p:cNvSpPr txBox="1"/>
           <p:nvPr/>
         </p:nvSpPr>
@@ -15908,7 +15908,7 @@
                 <a:ea typeface="Calibri" pitchFamily="34" charset="-122"/>
                 <a:cs typeface="Calibri" pitchFamily="34" charset="-120"/>
               </a:rPr>
-              <a:t>Waterfall tiered. The recurring line — never priced per seat</a:t>
+              <a:t>Highest visibility, best lead source</a:t>
             </a:r>
             <a:endParaRPr lang="en-US" sz="1050" dirty="0"/>
           </a:p>
@@ -15916,227 +15916,41 @@
       </p:sp>
       <p:sp>
         <p:nvSpPr>
-          <p:cNvPr id="24" name="Shape 22"/>
-          <p:cNvSpPr/>
-          <p:nvPr/>
-        </p:nvSpPr>
-        <p:spPr>
-          <a:xfrm>
-            <a:off x="777240" y="5148072"/>
-            <a:ext cx="10652760" cy="658368"/>
-          </a:xfrm>
-          <a:prstGeom prst="roundRect">
-            <a:avLst>
-              <a:gd name="adj" fmla="val 6944"/>
-            </a:avLst>
-          </a:prstGeom>
-          <a:solidFill>
-            <a:srgbClr val="161B2B"/>
-          </a:solidFill>
-          <a:ln w="9525">
-            <a:solidFill>
-              <a:srgbClr val="2E3550"/>
-            </a:solidFill>
-            <a:prstDash val="solid"/>
-          </a:ln>
-        </p:spPr>
-      </p:sp>
-      <p:sp>
-        <p:nvSpPr>
-          <p:cNvPr id="25" name="Text 23"/>
-          <p:cNvSpPr txBox="1"/>
-          <p:nvPr/>
-        </p:nvSpPr>
-        <p:spPr>
-          <a:xfrm>
-            <a:off x="1069848" y="5367528"/>
-            <a:ext cx="365760" cy="274320"/>
-          </a:xfrm>
-          <a:prstGeom prst="rect">
-            <a:avLst/>
-          </a:prstGeom>
-          <a:noFill/>
-          <a:ln/>
-        </p:spPr>
-        <p:txBody>
-          <a:bodyPr wrap="square" lIns="0" tIns="0" rIns="0" bIns="0" rtlCol="0" anchor="ctr"/>
-          <a:lstStyle/>
-          <a:p>
-            <a:pPr indent="0" marL="0">
-              <a:buNone/>
-            </a:pPr>
-            <a:r>
-              <a:rPr lang="en-US" sz="1700" dirty="0">
-                <a:solidFill>
-                  <a:srgbClr val="D8AA43"/>
+          <p:cNvPr id="29" name="Text 27"/>
+          <p:cNvSpPr txBox="1"/>
+          <p:nvPr/>
+        </p:nvSpPr>
+        <p:spPr>
+          <a:xfrm>
+            <a:off x="777240" y="5074920"/>
+            <a:ext cx="10607040" cy="822960"/>
+          </a:xfrm>
+          <a:prstGeom prst="rect">
+            <a:avLst/>
+          </a:prstGeom>
+          <a:noFill/>
+          <a:ln/>
+        </p:spPr>
+        <p:txBody>
+          <a:bodyPr wrap="square" lIns="0" tIns="0" rIns="0" bIns="0" rtlCol="0" anchor="ctr"/>
+          <a:lstStyle/>
+          <a:p>
+            <a:pPr indent="0" marL="0">
+              <a:lnSpc>
+                <a:spcPts val="1875"/>
+              </a:lnSpc>
+              <a:buNone/>
+            </a:pPr>
+            <a:r>
+              <a:rPr lang="en-US" sz="1250" i="1" dirty="0">
+                <a:solidFill>
+                  <a:srgbClr val="A69F94"/>
                 </a:solidFill>
                 <a:latin typeface="Cambria" pitchFamily="34" charset="0"/>
                 <a:ea typeface="Cambria" pitchFamily="34" charset="-122"/>
                 <a:cs typeface="Cambria" pitchFamily="34" charset="-120"/>
               </a:rPr>
-              <a:t>4</a:t>
-            </a:r>
-            <a:endParaRPr lang="en-US" sz="1700" dirty="0"/>
-          </a:p>
-        </p:txBody>
-      </p:sp>
-      <p:sp>
-        <p:nvSpPr>
-          <p:cNvPr id="26" name="Text 24"/>
-          <p:cNvSpPr txBox="1"/>
-          <p:nvPr/>
-        </p:nvSpPr>
-        <p:spPr>
-          <a:xfrm>
-            <a:off x="1691640" y="5367528"/>
-            <a:ext cx="3291840" cy="274320"/>
-          </a:xfrm>
-          <a:prstGeom prst="rect">
-            <a:avLst/>
-          </a:prstGeom>
-          <a:noFill/>
-          <a:ln/>
-        </p:spPr>
-        <p:txBody>
-          <a:bodyPr wrap="square" lIns="0" tIns="0" rIns="0" bIns="0" rtlCol="0" anchor="ctr"/>
-          <a:lstStyle/>
-          <a:p>
-            <a:pPr indent="0" marL="0">
-              <a:buNone/>
-            </a:pPr>
-            <a:r>
-              <a:rPr lang="en-US" sz="1500" dirty="0">
-                <a:solidFill>
-                  <a:srgbClr val="F5EDDA"/>
-                </a:solidFill>
-                <a:latin typeface="Cambria" pitchFamily="34" charset="0"/>
-                <a:ea typeface="Cambria" pitchFamily="34" charset="-122"/>
-                <a:cs typeface="Cambria" pitchFamily="34" charset="-120"/>
-              </a:rPr>
-              <a:t>Conference, festival, event</a:t>
-            </a:r>
-            <a:endParaRPr lang="en-US" sz="1500" dirty="0"/>
-          </a:p>
-        </p:txBody>
-      </p:sp>
-      <p:sp>
-        <p:nvSpPr>
-          <p:cNvPr id="27" name="Text 25"/>
-          <p:cNvSpPr txBox="1"/>
-          <p:nvPr/>
-        </p:nvSpPr>
-        <p:spPr>
-          <a:xfrm>
-            <a:off x="5166360" y="5349240"/>
-            <a:ext cx="2377440" cy="274320"/>
-          </a:xfrm>
-          <a:prstGeom prst="rect">
-            <a:avLst/>
-          </a:prstGeom>
-          <a:noFill/>
-          <a:ln/>
-        </p:spPr>
-        <p:txBody>
-          <a:bodyPr wrap="square" lIns="0" tIns="0" rIns="0" bIns="0" rtlCol="0" anchor="ctr"/>
-          <a:lstStyle/>
-          <a:p>
-            <a:pPr indent="0" marL="0">
-              <a:buNone/>
-            </a:pPr>
-            <a:r>
-              <a:rPr lang="en-US" sz="1250" b="1" dirty="0">
-                <a:solidFill>
-                  <a:srgbClr val="D8AA43"/>
-                </a:solidFill>
-                <a:latin typeface="Calibri" pitchFamily="34" charset="0"/>
-                <a:ea typeface="Calibri" pitchFamily="34" charset="-122"/>
-                <a:cs typeface="Calibri" pitchFamily="34" charset="-120"/>
-              </a:rPr>
-              <a:t>Custom</a:t>
-            </a:r>
-            <a:endParaRPr lang="en-US" sz="1250" dirty="0"/>
-          </a:p>
-        </p:txBody>
-      </p:sp>
-      <p:sp>
-        <p:nvSpPr>
-          <p:cNvPr id="28" name="Text 26"/>
-          <p:cNvSpPr txBox="1"/>
-          <p:nvPr/>
-        </p:nvSpPr>
-        <p:spPr>
-          <a:xfrm>
-            <a:off x="7726680" y="5367528"/>
-            <a:ext cx="3566160" cy="274320"/>
-          </a:xfrm>
-          <a:prstGeom prst="rect">
-            <a:avLst/>
-          </a:prstGeom>
-          <a:noFill/>
-          <a:ln/>
-        </p:spPr>
-        <p:txBody>
-          <a:bodyPr wrap="square" lIns="0" tIns="0" rIns="0" bIns="0" rtlCol="0" anchor="ctr"/>
-          <a:lstStyle/>
-          <a:p>
-            <a:pPr indent="0" marL="0">
-              <a:lnSpc>
-                <a:spcPts val="1701"/>
-              </a:lnSpc>
-              <a:buNone/>
-            </a:pPr>
-            <a:r>
-              <a:rPr lang="en-US" sz="1050" dirty="0">
-                <a:solidFill>
-                  <a:srgbClr val="A69F94"/>
-                </a:solidFill>
-                <a:latin typeface="Calibri" pitchFamily="34" charset="0"/>
-                <a:ea typeface="Calibri" pitchFamily="34" charset="-122"/>
-                <a:cs typeface="Calibri" pitchFamily="34" charset="-120"/>
-              </a:rPr>
-              <a:t>Highest visibility, best lead source</a:t>
-            </a:r>
-            <a:endParaRPr lang="en-US" sz="1050" dirty="0"/>
-          </a:p>
-        </p:txBody>
-      </p:sp>
-      <p:sp>
-        <p:nvSpPr>
-          <p:cNvPr id="29" name="Text 27"/>
-          <p:cNvSpPr txBox="1"/>
-          <p:nvPr/>
-        </p:nvSpPr>
-        <p:spPr>
-          <a:xfrm>
-            <a:off x="777240" y="5623560"/>
-            <a:ext cx="10607040" cy="822960"/>
-          </a:xfrm>
-          <a:prstGeom prst="rect">
-            <a:avLst/>
-          </a:prstGeom>
-          <a:noFill/>
-          <a:ln/>
-        </p:spPr>
-        <p:txBody>
-          <a:bodyPr wrap="square" lIns="0" tIns="0" rIns="0" bIns="0" rtlCol="0" anchor="ctr"/>
-          <a:lstStyle/>
-          <a:p>
-            <a:pPr indent="0" marL="0">
-              <a:lnSpc>
-                <a:spcPts val="1875"/>
-              </a:lnSpc>
-              <a:buNone/>
-            </a:pPr>
-            <a:r>
-              <a:rPr lang="en-US" sz="1250" i="1" dirty="0">
-                <a:solidFill>
-                  <a:srgbClr val="A69F94"/>
-                </a:solidFill>
-                <a:latin typeface="Cambria" pitchFamily="34" charset="0"/>
-                <a:ea typeface="Cambria" pitchFamily="34" charset="-122"/>
-                <a:cs typeface="Cambria" pitchFamily="34" charset="-120"/>
-              </a:rPr>
-              <a:t>Annual access is banded by company size and tiered as a waterfall, never by usage — so the privacy promise survives the pricing model completely. Per-seat pricing would require counting individual usage, which is the one thing the product refuses to do.</a:t>
+              <a:t>Annual access is priced on total headcount and tiered as a waterfall, never by usage — so the privacy promise survives the pricing model completely. Per-seat pricing would require counting individual usage, which is the one thing the product refuses to do.</a:t>
             </a:r>
             <a:endParaRPr lang="en-US" sz="1250" dirty="0"/>
           </a:p>
@@ -17212,7 +17026,7 @@
                 <a:ea typeface="Calibri" pitchFamily="34" charset="-122"/>
                 <a:cs typeface="Calibri" pitchFamily="34" charset="-120"/>
               </a:rPr>
-              <a:t>Dwight’s audience, Aleksandra’s market, Clara’s community</a:t>
+              <a:t>Dwight’s audience and Aleksandra’s market</a:t>
             </a:r>
             <a:endParaRPr lang="en-US" sz="1050" dirty="0"/>
           </a:p>
@@ -17442,7 +17256,7 @@
                 <a:ea typeface="Calibri" pitchFamily="34" charset="-122"/>
                 <a:cs typeface="Calibri" pitchFamily="34" charset="-120"/>
               </a:rPr>
-              <a:t>FIRST 60 DAYS</a:t>
+              <a:t>THE NEXT SIXTY DAYS</a:t>
             </a:r>
             <a:endParaRPr lang="en-US" sz="1050" dirty="0"/>
           </a:p>
@@ -17550,7 +17364,7 @@
                 <a:ea typeface="Cambria" pitchFamily="34" charset="-122"/>
                 <a:cs typeface="Cambria" pitchFamily="34" charset="-120"/>
               </a:rPr>
-              <a:t>Days 1–7</a:t>
+              <a:t>To 30 September</a:t>
             </a:r>
             <a:endParaRPr lang="en-US" sz="1500" dirty="0"/>
           </a:p>
@@ -17592,7 +17406,7 @@
                 <a:ea typeface="Calibri" pitchFamily="34" charset="-122"/>
                 <a:cs typeface="Calibri" pitchFamily="34" charset="-120"/>
               </a:rPr>
-              <a:t>Supabase project created. Paddle seller application in. Handover placed.</a:t>
+              <a:t>Beta opens. Indexing switched on. All 31 meditations mastered and live. Payment rail live, or the free tier opens without it.</a:t>
             </a:r>
             <a:endParaRPr lang="en-US" sz="1150" dirty="0"/>
           </a:p>
@@ -17606,7 +17420,7 @@
         </p:nvSpPr>
         <p:spPr>
           <a:xfrm>
-            <a:off x="777240" y="2999232"/>
+            <a:off x="777240" y="2926080"/>
             <a:ext cx="10652760" cy="694944"/>
           </a:xfrm>
           <a:prstGeom prst="roundRect">
@@ -17633,7 +17447,7 @@
         </p:nvSpPr>
         <p:spPr>
           <a:xfrm>
-            <a:off x="1069848" y="3218688"/>
+            <a:off x="1069848" y="3145536"/>
             <a:ext cx="1737360" cy="274320"/>
           </a:xfrm>
           <a:prstGeom prst="rect">
@@ -17658,7 +17472,7 @@
                 <a:ea typeface="Cambria" pitchFamily="34" charset="-122"/>
                 <a:cs typeface="Cambria" pitchFamily="34" charset="-120"/>
               </a:rPr>
-              <a:t>Days 8–24</a:t>
+              <a:t>Days 1–18</a:t>
             </a:r>
             <a:endParaRPr lang="en-US" sz="1500" dirty="0"/>
           </a:p>
@@ -17672,7 +17486,7 @@
         </p:nvSpPr>
         <p:spPr>
           <a:xfrm>
-            <a:off x="3063240" y="3209544"/>
+            <a:off x="3063240" y="3136392"/>
             <a:ext cx="8138160" cy="320040"/>
           </a:xfrm>
           <a:prstGeom prst="rect">
@@ -17700,7 +17514,7 @@
                 <a:ea typeface="Calibri" pitchFamily="34" charset="-122"/>
                 <a:cs typeface="Calibri" pitchFamily="34" charset="-120"/>
               </a:rPr>
-              <a:t>Posters. Cover removal pass. Legal pages drafted. Beta cohort recruited. Warm list named.</a:t>
+              <a:t>First cohort runs the protocols. Completion and return measured. First workshop filled.</a:t>
             </a:r>
             <a:endParaRPr lang="en-US" sz="1150" dirty="0"/>
           </a:p>
@@ -17714,7 +17528,7 @@
         </p:nvSpPr>
         <p:spPr>
           <a:xfrm>
-            <a:off x="777240" y="3785616"/>
+            <a:off x="777240" y="3639312"/>
             <a:ext cx="10652760" cy="694944"/>
           </a:xfrm>
           <a:prstGeom prst="roundRect">
@@ -17741,7 +17555,7 @@
         </p:nvSpPr>
         <p:spPr>
           <a:xfrm>
-            <a:off x="1069848" y="4005072"/>
+            <a:off x="1069848" y="3858768"/>
             <a:ext cx="1737360" cy="274320"/>
           </a:xfrm>
           <a:prstGeom prst="rect">
@@ -17766,7 +17580,7 @@
                 <a:ea typeface="Cambria" pitchFamily="34" charset="-122"/>
                 <a:cs typeface="Cambria" pitchFamily="34" charset="-120"/>
               </a:rPr>
-              <a:t>Days 25–38</a:t>
+              <a:t>Days 19–32</a:t>
             </a:r>
             <a:endParaRPr lang="en-US" sz="1500" dirty="0"/>
           </a:p>
@@ -17780,7 +17594,7 @@
         </p:nvSpPr>
         <p:spPr>
           <a:xfrm>
-            <a:off x="3063240" y="3995928"/>
+            <a:off x="3063240" y="3849624"/>
             <a:ext cx="8138160" cy="320040"/>
           </a:xfrm>
           <a:prstGeom prst="rect">
@@ -17808,7 +17622,7 @@
                 <a:ea typeface="Calibri" pitchFamily="34" charset="-122"/>
                 <a:cs typeface="Calibri" pitchFamily="34" charset="-120"/>
               </a:rPr>
-              <a:t>Cohort runs the protocols. Completion and return measured. First workshop filled. Payment tested end to end.</a:t>
+              <a:t>Workshop delivered. Testimonials captured. Payment tested end to end. First conversion number in hand.</a:t>
             </a:r>
             <a:endParaRPr lang="en-US" sz="1150" dirty="0"/>
           </a:p>
@@ -17822,7 +17636,7 @@
         </p:nvSpPr>
         <p:spPr>
           <a:xfrm>
-            <a:off x="777240" y="4572000"/>
+            <a:off x="777240" y="4352544"/>
             <a:ext cx="10652760" cy="694944"/>
           </a:xfrm>
           <a:prstGeom prst="roundRect">
@@ -17849,7 +17663,7 @@
         </p:nvSpPr>
         <p:spPr>
           <a:xfrm>
-            <a:off x="1069848" y="4791456"/>
+            <a:off x="1069848" y="4572000"/>
             <a:ext cx="1737360" cy="274320"/>
           </a:xfrm>
           <a:prstGeom prst="rect">
@@ -17874,7 +17688,7 @@
                 <a:ea typeface="Cambria" pitchFamily="34" charset="-122"/>
                 <a:cs typeface="Cambria" pitchFamily="34" charset="-120"/>
               </a:rPr>
-              <a:t>Days 39–45</a:t>
+              <a:t>Days 33–45</a:t>
             </a:r>
             <a:endParaRPr lang="en-US" sz="1500" dirty="0"/>
           </a:p>
@@ -17888,7 +17702,7 @@
         </p:nvSpPr>
         <p:spPr>
           <a:xfrm>
-            <a:off x="3063240" y="4782312"/>
+            <a:off x="3063240" y="4562856"/>
             <a:ext cx="8138160" cy="320040"/>
           </a:xfrm>
           <a:prstGeom prst="rect">
@@ -17916,7 +17730,7 @@
                 <a:ea typeface="Calibri" pitchFamily="34" charset="-122"/>
                 <a:cs typeface="Calibri" pitchFamily="34" charset="-120"/>
               </a:rPr>
-              <a:t>Workshop delivered. Testimonials captured. Gate A reviewed.</a:t>
+              <a:t>Gate A reviewed against the conversion and churn floors. First 1:1 sessions delivered.</a:t>
             </a:r>
             <a:endParaRPr lang="en-US" sz="1150" dirty="0"/>
           </a:p>
@@ -17930,7 +17744,7 @@
         </p:nvSpPr>
         <p:spPr>
           <a:xfrm>
-            <a:off x="777240" y="5358384"/>
+            <a:off x="777240" y="5065776"/>
             <a:ext cx="10652760" cy="694944"/>
           </a:xfrm>
           <a:prstGeom prst="roundRect">
@@ -17957,7 +17771,7 @@
         </p:nvSpPr>
         <p:spPr>
           <a:xfrm>
-            <a:off x="1069848" y="5577840"/>
+            <a:off x="1069848" y="5285232"/>
             <a:ext cx="1737360" cy="274320"/>
           </a:xfrm>
           <a:prstGeom prst="rect">
@@ -17996,7 +17810,7 @@
         </p:nvSpPr>
         <p:spPr>
           <a:xfrm>
-            <a:off x="3063240" y="5568696"/>
+            <a:off x="3063240" y="5276088"/>
             <a:ext cx="8138160" cy="320040"/>
           </a:xfrm>
           <a:prstGeom prst="rect">
@@ -18024,7 +17838,7 @@
                 <a:ea typeface="Calibri" pitchFamily="34" charset="-122"/>
                 <a:cs typeface="Calibri" pitchFamily="34" charset="-120"/>
               </a:rPr>
-              <a:t>Open for paid. First 1:1 sessions. Corporate outreach opens with retention data in hand.</a:t>
+              <a:t>Corporate outreach opens with retention data in hand. Warm list worked. First organisation workshop scoped.</a:t>
             </a:r>
             <a:endParaRPr lang="en-US" sz="1150" dirty="0"/>
           </a:p>
@@ -18038,7 +17852,7 @@
         </p:nvSpPr>
         <p:spPr>
           <a:xfrm>
-            <a:off x="777240" y="5897880"/>
+            <a:off x="777240" y="5788152"/>
             <a:ext cx="10607040" cy="822960"/>
           </a:xfrm>
           <a:prstGeom prst="rect">
@@ -18066,7 +17880,7 @@
                 <a:ea typeface="Cambria" pitchFamily="34" charset="-122"/>
                 <a:cs typeface="Cambria" pitchFamily="34" charset="-120"/>
               </a:rPr>
-              <a:t>The free tier can start on day one. It is the only part of this that no external approval can hold up.</a:t>
+              <a:t>The free tier needs no external approval — the only part of this that nothing outside the business can hold up.</a:t>
             </a:r>
             <a:endParaRPr lang="en-US" sz="1300" dirty="0"/>
           </a:p>
@@ -20393,7 +20207,7 @@
         <p:spPr>
           <a:xfrm>
             <a:off x="6309360" y="2194560"/>
-            <a:ext cx="5120640" cy="658368"/>
+            <a:ext cx="5120640" cy="868680"/>
           </a:xfrm>
           <a:prstGeom prst="roundRect">
             <a:avLst>
@@ -20459,7 +20273,7 @@
         <p:spPr>
           <a:xfrm>
             <a:off x="6601968" y="2505456"/>
-            <a:ext cx="4572000" cy="320040"/>
+            <a:ext cx="4572000" cy="502920"/>
           </a:xfrm>
           <a:prstGeom prst="rect">
             <a:avLst/>
@@ -20500,7 +20314,7 @@
         </p:nvSpPr>
         <p:spPr>
           <a:xfrm>
-            <a:off x="6309360" y="2907792"/>
+            <a:off x="6309360" y="3246120"/>
             <a:ext cx="5120640" cy="658368"/>
           </a:xfrm>
           <a:prstGeom prst="roundRect">
@@ -20527,7 +20341,7 @@
         </p:nvSpPr>
         <p:spPr>
           <a:xfrm>
-            <a:off x="6601968" y="2980944"/>
+            <a:off x="6601968" y="3319272"/>
             <a:ext cx="4572000" cy="256032"/>
           </a:xfrm>
           <a:prstGeom prst="rect">
@@ -20566,7 +20380,7 @@
         </p:nvSpPr>
         <p:spPr>
           <a:xfrm>
-            <a:off x="6601968" y="3218688"/>
+            <a:off x="6601968" y="3557016"/>
             <a:ext cx="4572000" cy="320040"/>
           </a:xfrm>
           <a:prstGeom prst="rect">
@@ -20608,7 +20422,7 @@
         </p:nvSpPr>
         <p:spPr>
           <a:xfrm>
-            <a:off x="6309360" y="3621024"/>
+            <a:off x="6309360" y="4297680"/>
             <a:ext cx="5120640" cy="658368"/>
           </a:xfrm>
           <a:prstGeom prst="roundRect">
@@ -20635,7 +20449,7 @@
         </p:nvSpPr>
         <p:spPr>
           <a:xfrm>
-            <a:off x="6601968" y="3694176"/>
+            <a:off x="6601968" y="4370832"/>
             <a:ext cx="4572000" cy="256032"/>
           </a:xfrm>
           <a:prstGeom prst="rect">
@@ -20674,7 +20488,7 @@
         </p:nvSpPr>
         <p:spPr>
           <a:xfrm>
-            <a:off x="6601968" y="3931920"/>
+            <a:off x="6601968" y="4608576"/>
             <a:ext cx="4572000" cy="320040"/>
           </a:xfrm>
           <a:prstGeom prst="rect">
@@ -20703,114 +20517,6 @@
                 <a:cs typeface="Calibri" pitchFamily="34" charset="-120"/>
               </a:rPr>
               <a:t>Discipline and men’s audience — co-branded track and podcast, revenue-shared</a:t>
-            </a:r>
-            <a:endParaRPr lang="en-US" sz="950" dirty="0"/>
-          </a:p>
-        </p:txBody>
-      </p:sp>
-      <p:sp>
-        <p:nvSpPr>
-          <p:cNvPr id="17" name="Shape 15"/>
-          <p:cNvSpPr/>
-          <p:nvPr/>
-        </p:nvSpPr>
-        <p:spPr>
-          <a:xfrm>
-            <a:off x="6309360" y="4334256"/>
-            <a:ext cx="5120640" cy="658368"/>
-          </a:xfrm>
-          <a:prstGeom prst="roundRect">
-            <a:avLst>
-              <a:gd name="adj" fmla="val 6944"/>
-            </a:avLst>
-          </a:prstGeom>
-          <a:solidFill>
-            <a:srgbClr val="161B2B"/>
-          </a:solidFill>
-          <a:ln w="9525">
-            <a:solidFill>
-              <a:srgbClr val="2E3550"/>
-            </a:solidFill>
-            <a:prstDash val="solid"/>
-          </a:ln>
-        </p:spPr>
-      </p:sp>
-      <p:sp>
-        <p:nvSpPr>
-          <p:cNvPr id="18" name="Text 16"/>
-          <p:cNvSpPr txBox="1"/>
-          <p:nvPr/>
-        </p:nvSpPr>
-        <p:spPr>
-          <a:xfrm>
-            <a:off x="6601968" y="4407408"/>
-            <a:ext cx="4572000" cy="256032"/>
-          </a:xfrm>
-          <a:prstGeom prst="rect">
-            <a:avLst/>
-          </a:prstGeom>
-          <a:noFill/>
-          <a:ln/>
-        </p:spPr>
-        <p:txBody>
-          <a:bodyPr wrap="square" lIns="0" tIns="0" rIns="0" bIns="0" rtlCol="0" anchor="ctr"/>
-          <a:lstStyle/>
-          <a:p>
-            <a:pPr indent="0" marL="0">
-              <a:buNone/>
-            </a:pPr>
-            <a:r>
-              <a:rPr lang="en-US" sz="1400" dirty="0">
-                <a:solidFill>
-                  <a:srgbClr val="D8AA43"/>
-                </a:solidFill>
-                <a:latin typeface="Cambria" pitchFamily="34" charset="0"/>
-                <a:ea typeface="Cambria" pitchFamily="34" charset="-122"/>
-                <a:cs typeface="Cambria" pitchFamily="34" charset="-120"/>
-              </a:rPr>
-              <a:t>Clara</a:t>
-            </a:r>
-            <a:endParaRPr lang="en-US" sz="1400" dirty="0"/>
-          </a:p>
-        </p:txBody>
-      </p:sp>
-      <p:sp>
-        <p:nvSpPr>
-          <p:cNvPr id="19" name="Text 17"/>
-          <p:cNvSpPr txBox="1"/>
-          <p:nvPr/>
-        </p:nvSpPr>
-        <p:spPr>
-          <a:xfrm>
-            <a:off x="6601968" y="4645152"/>
-            <a:ext cx="4572000" cy="320040"/>
-          </a:xfrm>
-          <a:prstGeom prst="rect">
-            <a:avLst/>
-          </a:prstGeom>
-          <a:noFill/>
-          <a:ln/>
-        </p:spPr>
-        <p:txBody>
-          <a:bodyPr wrap="square" lIns="0" tIns="0" rIns="0" bIns="0" rtlCol="0" anchor="ctr"/>
-          <a:lstStyle/>
-          <a:p>
-            <a:pPr indent="0" marL="0">
-              <a:lnSpc>
-                <a:spcPts val="1539"/>
-              </a:lnSpc>
-              <a:buNone/>
-            </a:pPr>
-            <a:r>
-              <a:rPr lang="en-US" sz="950" dirty="0">
-                <a:solidFill>
-                  <a:srgbClr val="A69F94"/>
-                </a:solidFill>
-                <a:latin typeface="Calibri" pitchFamily="34" charset="0"/>
-                <a:ea typeface="Calibri" pitchFamily="34" charset="-122"/>
-                <a:cs typeface="Calibri" pitchFamily="34" charset="-120"/>
-              </a:rPr>
-              <a:t>Community and cultural provision — local pilot, culturally specific delivery</a:t>
             </a:r>
             <a:endParaRPr lang="en-US" sz="950" dirty="0"/>
           </a:p>
@@ -21043,7 +20749,7 @@
                 <a:ea typeface="Cambria" pitchFamily="34" charset="-122"/>
                 <a:cs typeface="Cambria" pitchFamily="34" charset="-120"/>
               </a:rPr>
-              <a:t>$202,860 of work, already delivered.</a:t>
+              <a:t>$232,005 of work, already delivered.</a:t>
             </a:r>
             <a:endParaRPr lang="en-US" sz="3400" dirty="0"/>
           </a:p>
@@ -21082,7 +20788,7 @@
                 <a:ea typeface="Cambria" pitchFamily="34" charset="-122"/>
                 <a:cs typeface="Cambria" pitchFamily="34" charset="-120"/>
               </a:rPr>
-              <a:t>2,316</a:t>
+              <a:t>2,644</a:t>
             </a:r>
             <a:endParaRPr lang="en-US" sz="5800" dirty="0"/>
           </a:p>
@@ -21124,7 +20830,7 @@
                 <a:ea typeface="Calibri" pitchFamily="34" charset="-122"/>
                 <a:cs typeface="Calibri" pitchFamily="34" charset="-120"/>
               </a:rPr>
-              <a:t>hours of measured work — 57.9 full-time weeks</a:t>
+              <a:t>hours of measured work — 66.1 full-time weeks</a:t>
             </a:r>
             <a:endParaRPr lang="en-US" sz="1250" dirty="0"/>
           </a:p>
@@ -21166,7 +20872,7 @@
                 <a:ea typeface="Calibri" pitchFamily="34" charset="-122"/>
                 <a:cs typeface="Calibri" pitchFamily="34" charset="-120"/>
               </a:rPr>
-              <a:t>Replacement cost at contractor rates. Not a valuation. Founder time carries no invoice; this is the number that would have appeared on one.</a:t>
+              <a:t>Replacement cost at contractor rates. Not a valuation. Founder time carries no invoice; this is the number that would have appeared on one. $15,000 of cash has gone in alongside it.</a:t>
             </a:r>
             <a:endParaRPr lang="en-US" sz="1200" dirty="0"/>
           </a:p>
@@ -21271,7 +20977,7 @@
                 <a:ea typeface="Calibri" pitchFamily="34" charset="-122"/>
                 <a:cs typeface="Calibri" pitchFamily="34" charset="-120"/>
               </a:rPr>
-              <a:t>$83,750</a:t>
+              <a:t>$87,065</a:t>
             </a:r>
             <a:endParaRPr lang="en-US" sz="1300" dirty="0"/>
           </a:p>
@@ -21310,7 +21016,7 @@
                 <a:ea typeface="Calibri" pitchFamily="34" charset="-122"/>
                 <a:cs typeface="Calibri" pitchFamily="34" charset="-120"/>
               </a:rPr>
-              <a:t>940 hrs</a:t>
+              <a:t>977 hrs</a:t>
             </a:r>
             <a:endParaRPr lang="en-US" sz="1100" dirty="0"/>
           </a:p>
@@ -21415,7 +21121,7 @@
                 <a:ea typeface="Calibri" pitchFamily="34" charset="-122"/>
                 <a:cs typeface="Calibri" pitchFamily="34" charset="-120"/>
               </a:rPr>
-              <a:t>$73,910</a:t>
+              <a:t>$86,200</a:t>
             </a:r>
             <a:endParaRPr lang="en-US" sz="1300" dirty="0"/>
           </a:p>
@@ -21454,7 +21160,7 @@
                 <a:ea typeface="Calibri" pitchFamily="34" charset="-122"/>
                 <a:cs typeface="Calibri" pitchFamily="34" charset="-120"/>
               </a:rPr>
-              <a:t>972 hrs</a:t>
+              <a:t>1,134 hrs</a:t>
             </a:r>
             <a:endParaRPr lang="en-US" sz="1100" dirty="0"/>
           </a:p>
@@ -21559,7 +21265,7 @@
                 <a:ea typeface="Calibri" pitchFamily="34" charset="-122"/>
                 <a:cs typeface="Calibri" pitchFamily="34" charset="-120"/>
               </a:rPr>
-              <a:t>$45,200</a:t>
+              <a:t>$58,740</a:t>
             </a:r>
             <a:endParaRPr lang="en-US" sz="1300" dirty="0"/>
           </a:p>
@@ -21598,7 +21304,7 @@
                 <a:ea typeface="Calibri" pitchFamily="34" charset="-122"/>
                 <a:cs typeface="Calibri" pitchFamily="34" charset="-120"/>
               </a:rPr>
-              <a:t>404 hrs</a:t>
+              <a:t>533 hrs</a:t>
             </a:r>
             <a:endParaRPr lang="en-US" sz="1100" dirty="0"/>
           </a:p>
@@ -21640,7 +21346,7 @@
                 <a:ea typeface="Cambria" pitchFamily="34" charset="-122"/>
                 <a:cs typeface="Cambria" pitchFamily="34" charset="-120"/>
               </a:rPr>
-              <a:t>The corpus, method, design system, member architecture and framework layer are built. What remains is consolidation, QA, legal completion and distribution — not conceptual invention.</a:t>
+              <a:t>The corpus, method, design system, member architecture and framework layer are built. What remains is consolidation, QA, legal completion and distribution — not conceptual invention. The bridge ahead asks for $15,000, which doubles the cash in and buys a measured conversion number.</a:t>
             </a:r>
             <a:endParaRPr lang="en-US" sz="1350" dirty="0"/>
           </a:p>

--- a/docs/business/SafeRise-Investor-Deck.pptx
+++ b/docs/business/SafeRise-Investor-Deck.pptx
@@ -5245,6 +5245,10 @@
           </a:solidFill>
           <a:ln/>
         </p:spPr>
+        <p:txBody>
+          <a:bodyPr/>
+          <a:p/>
+        </p:txBody>
       </p:sp>
       <p:sp>
         <p:nvSpPr>
@@ -5267,6 +5271,10 @@
           </a:solidFill>
           <a:ln/>
         </p:spPr>
+        <p:txBody>
+          <a:bodyPr/>
+          <a:p/>
+        </p:txBody>
       </p:sp>
       <p:sp>
         <p:nvSpPr>
@@ -5287,6 +5295,10 @@
           </a:solidFill>
           <a:ln/>
         </p:spPr>
+        <p:txBody>
+          <a:bodyPr/>
+          <a:p/>
+        </p:txBody>
       </p:sp>
       <p:sp>
         <p:nvSpPr>
@@ -5453,6 +5465,10 @@
             <a:prstDash val="solid"/>
           </a:ln>
         </p:spPr>
+        <p:txBody>
+          <a:bodyPr/>
+          <a:p/>
+        </p:txBody>
       </p:sp>
       <p:sp>
         <p:nvSpPr>
@@ -5674,6 +5690,10 @@
             <a:prstDash val="solid"/>
           </a:ln>
         </p:spPr>
+        <p:txBody>
+          <a:bodyPr/>
+          <a:p/>
+        </p:txBody>
       </p:sp>
       <p:sp>
         <p:nvSpPr>
@@ -5782,6 +5802,10 @@
             <a:prstDash val="solid"/>
           </a:ln>
         </p:spPr>
+        <p:txBody>
+          <a:bodyPr/>
+          <a:p/>
+        </p:txBody>
       </p:sp>
       <p:sp>
         <p:nvSpPr>
@@ -5890,6 +5914,10 @@
             <a:prstDash val="solid"/>
           </a:ln>
         </p:spPr>
+        <p:txBody>
+          <a:bodyPr/>
+          <a:p/>
+        </p:txBody>
       </p:sp>
       <p:sp>
         <p:nvSpPr>
@@ -5998,6 +6026,10 @@
             <a:prstDash val="solid"/>
           </a:ln>
         </p:spPr>
+        <p:txBody>
+          <a:bodyPr/>
+          <a:p/>
+        </p:txBody>
       </p:sp>
       <p:sp>
         <p:nvSpPr>
@@ -6130,7 +6162,7 @@
         </p:nvSpPr>
         <p:spPr>
           <a:xfrm>
-            <a:off x="777240" y="6400800"/>
+            <a:off x="777240" y="6583680"/>
             <a:ext cx="7315200" cy="274320"/>
           </a:xfrm>
           <a:prstGeom prst="rect">
@@ -6169,7 +6201,7 @@
         </p:nvSpPr>
         <p:spPr>
           <a:xfrm>
-            <a:off x="11137392" y="6400800"/>
+            <a:off x="11137392" y="6583680"/>
             <a:ext cx="457200" cy="274320"/>
           </a:xfrm>
           <a:prstGeom prst="rect">
@@ -6359,6 +6391,10 @@
             <a:prstDash val="solid"/>
           </a:ln>
         </p:spPr>
+        <p:txBody>
+          <a:bodyPr/>
+          <a:p/>
+        </p:txBody>
       </p:sp>
       <p:sp>
         <p:nvSpPr>
@@ -6543,6 +6579,10 @@
             <a:prstDash val="solid"/>
           </a:ln>
         </p:spPr>
+        <p:txBody>
+          <a:bodyPr/>
+          <a:p/>
+        </p:txBody>
       </p:sp>
       <p:sp>
         <p:nvSpPr>
@@ -7033,7 +7073,7 @@
         </p:nvSpPr>
         <p:spPr>
           <a:xfrm>
-            <a:off x="777240" y="6400800"/>
+            <a:off x="777240" y="6583680"/>
             <a:ext cx="7315200" cy="274320"/>
           </a:xfrm>
           <a:prstGeom prst="rect">
@@ -7072,7 +7112,7 @@
         </p:nvSpPr>
         <p:spPr>
           <a:xfrm>
-            <a:off x="11137392" y="6400800"/>
+            <a:off x="11137392" y="6583680"/>
             <a:ext cx="457200" cy="274320"/>
           </a:xfrm>
           <a:prstGeom prst="rect">
@@ -7266,6 +7306,10 @@
             <a:prstDash val="solid"/>
           </a:ln>
         </p:spPr>
+        <p:txBody>
+          <a:bodyPr/>
+          <a:p/>
+        </p:txBody>
       </p:sp>
       <p:pic>
         <p:nvPicPr>
@@ -7317,6 +7361,10 @@
             <a:prstDash val="solid"/>
           </a:ln>
         </p:spPr>
+        <p:txBody>
+          <a:bodyPr/>
+          <a:p/>
+        </p:txBody>
       </p:sp>
       <p:pic>
         <p:nvPicPr>
@@ -7368,6 +7416,10 @@
             <a:prstDash val="solid"/>
           </a:ln>
         </p:spPr>
+        <p:txBody>
+          <a:bodyPr/>
+          <a:p/>
+        </p:txBody>
       </p:sp>
       <p:pic>
         <p:nvPicPr>
@@ -7419,6 +7471,10 @@
             <a:prstDash val="solid"/>
           </a:ln>
         </p:spPr>
+        <p:txBody>
+          <a:bodyPr/>
+          <a:p/>
+        </p:txBody>
       </p:sp>
       <p:pic>
         <p:nvPicPr>
@@ -7470,6 +7526,10 @@
             <a:prstDash val="solid"/>
           </a:ln>
         </p:spPr>
+        <p:txBody>
+          <a:bodyPr/>
+          <a:p/>
+        </p:txBody>
       </p:sp>
       <p:pic>
         <p:nvPicPr>
@@ -7521,6 +7581,10 @@
             <a:prstDash val="solid"/>
           </a:ln>
         </p:spPr>
+        <p:txBody>
+          <a:bodyPr/>
+          <a:p/>
+        </p:txBody>
       </p:sp>
       <p:sp>
         <p:nvSpPr>
@@ -7572,7 +7636,7 @@
         </p:nvSpPr>
         <p:spPr>
           <a:xfrm>
-            <a:off x="777240" y="5760720"/>
+            <a:off x="777240" y="5715000"/>
             <a:ext cx="10607040" cy="822960"/>
           </a:xfrm>
           <a:prstGeom prst="rect">
@@ -7614,7 +7678,7 @@
         </p:nvSpPr>
         <p:spPr>
           <a:xfrm>
-            <a:off x="777240" y="6400800"/>
+            <a:off x="777240" y="6583680"/>
             <a:ext cx="7315200" cy="274320"/>
           </a:xfrm>
           <a:prstGeom prst="rect">
@@ -7653,7 +7717,7 @@
         </p:nvSpPr>
         <p:spPr>
           <a:xfrm>
-            <a:off x="11137392" y="6400800"/>
+            <a:off x="11137392" y="6583680"/>
             <a:ext cx="457200" cy="274320"/>
           </a:xfrm>
           <a:prstGeom prst="rect">
@@ -7865,6 +7929,10 @@
             <a:prstDash val="solid"/>
           </a:ln>
         </p:spPr>
+        <p:txBody>
+          <a:bodyPr/>
+          <a:p/>
+        </p:txBody>
       </p:sp>
       <p:sp>
         <p:nvSpPr>
@@ -8012,6 +8080,10 @@
             <a:prstDash val="solid"/>
           </a:ln>
         </p:spPr>
+        <p:txBody>
+          <a:bodyPr/>
+          <a:p/>
+        </p:txBody>
       </p:sp>
       <p:sp>
         <p:nvSpPr>
@@ -8159,6 +8231,10 @@
             <a:prstDash val="solid"/>
           </a:ln>
         </p:spPr>
+        <p:txBody>
+          <a:bodyPr/>
+          <a:p/>
+        </p:txBody>
       </p:sp>
       <p:sp>
         <p:nvSpPr>
@@ -8306,6 +8382,10 @@
             <a:prstDash val="solid"/>
           </a:ln>
         </p:spPr>
+        <p:txBody>
+          <a:bodyPr/>
+          <a:p/>
+        </p:txBody>
       </p:sp>
       <p:sp>
         <p:nvSpPr>
@@ -8453,6 +8533,10 @@
             <a:prstDash val="solid"/>
           </a:ln>
         </p:spPr>
+        <p:txBody>
+          <a:bodyPr/>
+          <a:p/>
+        </p:txBody>
       </p:sp>
       <p:sp>
         <p:nvSpPr>
@@ -8600,6 +8684,10 @@
             <a:prstDash val="solid"/>
           </a:ln>
         </p:spPr>
+        <p:txBody>
+          <a:bodyPr/>
+          <a:p/>
+        </p:txBody>
       </p:sp>
       <p:sp>
         <p:nvSpPr>
@@ -8771,7 +8859,7 @@
         </p:nvSpPr>
         <p:spPr>
           <a:xfrm>
-            <a:off x="777240" y="6400800"/>
+            <a:off x="777240" y="6583680"/>
             <a:ext cx="7315200" cy="274320"/>
           </a:xfrm>
           <a:prstGeom prst="rect">
@@ -8810,7 +8898,7 @@
         </p:nvSpPr>
         <p:spPr>
           <a:xfrm>
-            <a:off x="11137392" y="6400800"/>
+            <a:off x="11137392" y="6583680"/>
             <a:ext cx="457200" cy="274320"/>
           </a:xfrm>
           <a:prstGeom prst="rect">
@@ -8980,6 +9068,10 @@
             <a:prstDash val="solid"/>
           </a:ln>
         </p:spPr>
+        <p:txBody>
+          <a:bodyPr/>
+          <a:p/>
+        </p:txBody>
       </p:sp>
       <p:sp>
         <p:nvSpPr>
@@ -9205,6 +9297,10 @@
             <a:prstDash val="solid"/>
           </a:ln>
         </p:spPr>
+        <p:txBody>
+          <a:bodyPr/>
+          <a:p/>
+        </p:txBody>
       </p:sp>
       <p:sp>
         <p:nvSpPr>
@@ -9430,6 +9526,10 @@
             <a:prstDash val="solid"/>
           </a:ln>
         </p:spPr>
+        <p:txBody>
+          <a:bodyPr/>
+          <a:p/>
+        </p:txBody>
       </p:sp>
       <p:sp>
         <p:nvSpPr>
@@ -9655,6 +9755,10 @@
             <a:prstDash val="solid"/>
           </a:ln>
         </p:spPr>
+        <p:txBody>
+          <a:bodyPr/>
+          <a:p/>
+        </p:txBody>
       </p:sp>
       <p:sp>
         <p:nvSpPr>
@@ -9904,7 +10008,7 @@
         </p:nvSpPr>
         <p:spPr>
           <a:xfrm>
-            <a:off x="777240" y="6199632"/>
+            <a:off x="777240" y="6089904"/>
             <a:ext cx="10607040" cy="320040"/>
           </a:xfrm>
           <a:prstGeom prst="rect">
@@ -9946,7 +10050,7 @@
         </p:nvSpPr>
         <p:spPr>
           <a:xfrm>
-            <a:off x="777240" y="6400800"/>
+            <a:off x="777240" y="6583680"/>
             <a:ext cx="7315200" cy="274320"/>
           </a:xfrm>
           <a:prstGeom prst="rect">
@@ -9985,7 +10089,7 @@
         </p:nvSpPr>
         <p:spPr>
           <a:xfrm>
-            <a:off x="11137392" y="6400800"/>
+            <a:off x="11137392" y="6583680"/>
             <a:ext cx="457200" cy="274320"/>
           </a:xfrm>
           <a:prstGeom prst="rect">
@@ -10155,6 +10259,10 @@
             <a:prstDash val="solid"/>
           </a:ln>
         </p:spPr>
+        <p:txBody>
+          <a:bodyPr/>
+          <a:p/>
+        </p:txBody>
       </p:sp>
       <p:sp>
         <p:nvSpPr>
@@ -10872,7 +10980,7 @@
         </p:nvSpPr>
         <p:spPr>
           <a:xfrm>
-            <a:off x="777240" y="6400800"/>
+            <a:off x="777240" y="6583680"/>
             <a:ext cx="7315200" cy="274320"/>
           </a:xfrm>
           <a:prstGeom prst="rect">
@@ -10911,7 +11019,7 @@
         </p:nvSpPr>
         <p:spPr>
           <a:xfrm>
-            <a:off x="11137392" y="6400800"/>
+            <a:off x="11137392" y="6583680"/>
             <a:ext cx="457200" cy="274320"/>
           </a:xfrm>
           <a:prstGeom prst="rect">
@@ -11165,6 +11273,10 @@
             <a:prstDash val="solid"/>
           </a:ln>
         </p:spPr>
+        <p:txBody>
+          <a:bodyPr/>
+          <a:p/>
+        </p:txBody>
       </p:sp>
       <p:sp>
         <p:nvSpPr>
@@ -11273,6 +11385,10 @@
             <a:prstDash val="solid"/>
           </a:ln>
         </p:spPr>
+        <p:txBody>
+          <a:bodyPr/>
+          <a:p/>
+        </p:txBody>
       </p:sp>
       <p:sp>
         <p:nvSpPr>
@@ -11381,6 +11497,10 @@
             <a:prstDash val="solid"/>
           </a:ln>
         </p:spPr>
+        <p:txBody>
+          <a:bodyPr/>
+          <a:p/>
+        </p:txBody>
       </p:sp>
       <p:sp>
         <p:nvSpPr>
@@ -11594,7 +11714,7 @@
         </p:nvSpPr>
         <p:spPr>
           <a:xfrm>
-            <a:off x="777240" y="6400800"/>
+            <a:off x="777240" y="6583680"/>
             <a:ext cx="7315200" cy="274320"/>
           </a:xfrm>
           <a:prstGeom prst="rect">
@@ -11633,7 +11753,7 @@
         </p:nvSpPr>
         <p:spPr>
           <a:xfrm>
-            <a:off x="11137392" y="6400800"/>
+            <a:off x="11137392" y="6583680"/>
             <a:ext cx="457200" cy="274320"/>
           </a:xfrm>
           <a:prstGeom prst="rect">
@@ -11865,6 +11985,10 @@
             <a:prstDash val="solid"/>
           </a:ln>
         </p:spPr>
+        <p:txBody>
+          <a:bodyPr/>
+          <a:p/>
+        </p:txBody>
       </p:sp>
       <p:sp>
         <p:nvSpPr>
@@ -12129,6 +12253,10 @@
             <a:prstDash val="solid"/>
           </a:ln>
         </p:spPr>
+        <p:txBody>
+          <a:bodyPr/>
+          <a:p/>
+        </p:txBody>
       </p:sp>
       <p:sp>
         <p:nvSpPr>
@@ -12393,6 +12521,10 @@
             <a:prstDash val="solid"/>
           </a:ln>
         </p:spPr>
+        <p:txBody>
+          <a:bodyPr/>
+          <a:p/>
+        </p:txBody>
       </p:sp>
       <p:sp>
         <p:nvSpPr>
@@ -12639,7 +12771,7 @@
         </p:nvSpPr>
         <p:spPr>
           <a:xfrm>
-            <a:off x="777240" y="6035040"/>
+            <a:off x="777240" y="5925312"/>
             <a:ext cx="10607040" cy="822960"/>
           </a:xfrm>
           <a:prstGeom prst="rect">
@@ -12681,7 +12813,7 @@
         </p:nvSpPr>
         <p:spPr>
           <a:xfrm>
-            <a:off x="777240" y="6400800"/>
+            <a:off x="777240" y="6583680"/>
             <a:ext cx="7315200" cy="274320"/>
           </a:xfrm>
           <a:prstGeom prst="rect">
@@ -12720,7 +12852,7 @@
         </p:nvSpPr>
         <p:spPr>
           <a:xfrm>
-            <a:off x="11137392" y="6400800"/>
+            <a:off x="11137392" y="6583680"/>
             <a:ext cx="457200" cy="274320"/>
           </a:xfrm>
           <a:prstGeom prst="rect">
@@ -12793,6 +12925,7 @@
         </p:nvPicPr>
         <p:blipFill>
           <a:blip r:embed="rId1"/>
+          <a:srcRect t="6000" b="13900"/>
           <a:stretch>
             <a:fillRect/>
           </a:stretch>
@@ -12828,6 +12961,10 @@
           </a:solidFill>
           <a:ln/>
         </p:spPr>
+        <p:txBody>
+          <a:bodyPr/>
+          <a:p/>
+        </p:txBody>
       </p:sp>
       <p:sp>
         <p:nvSpPr>
@@ -12850,6 +12987,10 @@
           </a:solidFill>
           <a:ln/>
         </p:spPr>
+        <p:txBody>
+          <a:bodyPr/>
+          <a:p/>
+        </p:txBody>
       </p:sp>
       <p:sp>
         <p:nvSpPr>
@@ -12958,6 +13099,10 @@
             <a:prstDash val="solid"/>
           </a:ln>
         </p:spPr>
+        <p:txBody>
+          <a:bodyPr/>
+          <a:p/>
+        </p:txBody>
       </p:sp>
       <p:sp>
         <p:nvSpPr>
@@ -13150,6 +13295,10 @@
             <a:prstDash val="solid"/>
           </a:ln>
         </p:spPr>
+        <p:txBody>
+          <a:bodyPr/>
+          <a:p/>
+        </p:txBody>
       </p:sp>
       <p:sp>
         <p:nvSpPr>
@@ -13342,6 +13491,10 @@
             <a:prstDash val="solid"/>
           </a:ln>
         </p:spPr>
+        <p:txBody>
+          <a:bodyPr/>
+          <a:p/>
+        </p:txBody>
       </p:sp>
       <p:sp>
         <p:nvSpPr>
@@ -13534,6 +13687,10 @@
             <a:prstDash val="solid"/>
           </a:ln>
         </p:spPr>
+        <p:txBody>
+          <a:bodyPr/>
+          <a:p/>
+        </p:txBody>
       </p:sp>
       <p:sp>
         <p:nvSpPr>
@@ -13726,6 +13883,10 @@
             <a:prstDash val="solid"/>
           </a:ln>
         </p:spPr>
+        <p:txBody>
+          <a:bodyPr/>
+          <a:p/>
+        </p:txBody>
       </p:sp>
       <p:sp>
         <p:nvSpPr>
@@ -13855,7 +14016,7 @@
         </p:nvSpPr>
         <p:spPr>
           <a:xfrm>
-            <a:off x="777240" y="6400800"/>
+            <a:off x="777240" y="6583680"/>
             <a:ext cx="7315200" cy="274320"/>
           </a:xfrm>
           <a:prstGeom prst="rect">
@@ -13894,7 +14055,7 @@
         </p:nvSpPr>
         <p:spPr>
           <a:xfrm>
-            <a:off x="11137392" y="6400800"/>
+            <a:off x="11137392" y="6583680"/>
             <a:ext cx="457200" cy="274320"/>
           </a:xfrm>
           <a:prstGeom prst="rect">
@@ -14106,6 +14267,10 @@
             <a:prstDash val="solid"/>
           </a:ln>
         </p:spPr>
+        <p:txBody>
+          <a:bodyPr/>
+          <a:p/>
+        </p:txBody>
       </p:sp>
       <p:sp>
         <p:nvSpPr>
@@ -14214,6 +14379,10 @@
             <a:prstDash val="solid"/>
           </a:ln>
         </p:spPr>
+        <p:txBody>
+          <a:bodyPr/>
+          <a:p/>
+        </p:txBody>
       </p:sp>
       <p:sp>
         <p:nvSpPr>
@@ -14388,7 +14557,7 @@
         </p:nvSpPr>
         <p:spPr>
           <a:xfrm>
-            <a:off x="777240" y="6400800"/>
+            <a:off x="777240" y="6583680"/>
             <a:ext cx="7315200" cy="274320"/>
           </a:xfrm>
           <a:prstGeom prst="rect">
@@ -14427,7 +14596,7 @@
         </p:nvSpPr>
         <p:spPr>
           <a:xfrm>
-            <a:off x="11137392" y="6400800"/>
+            <a:off x="11137392" y="6583680"/>
             <a:ext cx="457200" cy="274320"/>
           </a:xfrm>
           <a:prstGeom prst="rect">
@@ -14987,7 +15156,7 @@
         </p:nvSpPr>
         <p:spPr>
           <a:xfrm>
-            <a:off x="777240" y="6400800"/>
+            <a:off x="777240" y="6583680"/>
             <a:ext cx="7315200" cy="274320"/>
           </a:xfrm>
           <a:prstGeom prst="rect">
@@ -15026,7 +15195,7 @@
         </p:nvSpPr>
         <p:spPr>
           <a:xfrm>
-            <a:off x="11137392" y="6400800"/>
+            <a:off x="11137392" y="6583680"/>
             <a:ext cx="457200" cy="274320"/>
           </a:xfrm>
           <a:prstGeom prst="rect">
@@ -15196,6 +15365,10 @@
             <a:prstDash val="solid"/>
           </a:ln>
         </p:spPr>
+        <p:txBody>
+          <a:bodyPr/>
+          <a:p/>
+        </p:txBody>
       </p:sp>
       <p:sp>
         <p:nvSpPr>
@@ -15382,6 +15555,10 @@
             <a:prstDash val="solid"/>
           </a:ln>
         </p:spPr>
+        <p:txBody>
+          <a:bodyPr/>
+          <a:p/>
+        </p:txBody>
       </p:sp>
       <p:sp>
         <p:nvSpPr>
@@ -15568,6 +15745,10 @@
             <a:prstDash val="solid"/>
           </a:ln>
         </p:spPr>
+        <p:txBody>
+          <a:bodyPr/>
+          <a:p/>
+        </p:txBody>
       </p:sp>
       <p:sp>
         <p:nvSpPr>
@@ -15754,6 +15935,10 @@
             <a:prstDash val="solid"/>
           </a:ln>
         </p:spPr>
+        <p:txBody>
+          <a:bodyPr/>
+          <a:p/>
+        </p:txBody>
       </p:sp>
       <p:sp>
         <p:nvSpPr>
@@ -15964,7 +16149,7 @@
         </p:nvSpPr>
         <p:spPr>
           <a:xfrm>
-            <a:off x="777240" y="6400800"/>
+            <a:off x="777240" y="6583680"/>
             <a:ext cx="7315200" cy="274320"/>
           </a:xfrm>
           <a:prstGeom prst="rect">
@@ -16003,7 +16188,7 @@
         </p:nvSpPr>
         <p:spPr>
           <a:xfrm>
-            <a:off x="11137392" y="6400800"/>
+            <a:off x="11137392" y="6583680"/>
             <a:ext cx="457200" cy="274320"/>
           </a:xfrm>
           <a:prstGeom prst="rect">
@@ -16215,6 +16400,10 @@
             <a:prstDash val="solid"/>
           </a:ln>
         </p:spPr>
+        <p:txBody>
+          <a:bodyPr/>
+          <a:p/>
+        </p:txBody>
       </p:sp>
       <p:sp>
         <p:nvSpPr>
@@ -16362,6 +16551,10 @@
             <a:prstDash val="solid"/>
           </a:ln>
         </p:spPr>
+        <p:txBody>
+          <a:bodyPr/>
+          <a:p/>
+        </p:txBody>
       </p:sp>
       <p:sp>
         <p:nvSpPr>
@@ -16509,6 +16702,10 @@
             <a:prstDash val="solid"/>
           </a:ln>
         </p:spPr>
+        <p:txBody>
+          <a:bodyPr/>
+          <a:p/>
+        </p:txBody>
       </p:sp>
       <p:sp>
         <p:nvSpPr>
@@ -16656,6 +16853,10 @@
             <a:prstDash val="solid"/>
           </a:ln>
         </p:spPr>
+        <p:txBody>
+          <a:bodyPr/>
+          <a:p/>
+        </p:txBody>
       </p:sp>
       <p:sp>
         <p:nvSpPr>
@@ -16803,6 +17004,10 @@
             <a:prstDash val="solid"/>
           </a:ln>
         </p:spPr>
+        <p:txBody>
+          <a:bodyPr/>
+          <a:p/>
+        </p:txBody>
       </p:sp>
       <p:sp>
         <p:nvSpPr>
@@ -16950,6 +17155,10 @@
             <a:prstDash val="solid"/>
           </a:ln>
         </p:spPr>
+        <p:txBody>
+          <a:bodyPr/>
+          <a:p/>
+        </p:txBody>
       </p:sp>
       <p:sp>
         <p:nvSpPr>
@@ -16998,7 +17207,7 @@
         </p:nvSpPr>
         <p:spPr>
           <a:xfrm>
-            <a:off x="4434840" y="6089904"/>
+            <a:off x="4434840" y="6053328"/>
             <a:ext cx="5669280" cy="274320"/>
           </a:xfrm>
           <a:prstGeom prst="rect">
@@ -17040,7 +17249,7 @@
         </p:nvSpPr>
         <p:spPr>
           <a:xfrm>
-            <a:off x="10287000" y="6089904"/>
+            <a:off x="10287000" y="6053328"/>
             <a:ext cx="1005840" cy="274320"/>
           </a:xfrm>
           <a:prstGeom prst="rect">
@@ -17079,7 +17288,7 @@
         </p:nvSpPr>
         <p:spPr>
           <a:xfrm>
-            <a:off x="777240" y="6309360"/>
+            <a:off x="777240" y="6199632"/>
             <a:ext cx="10607040" cy="822960"/>
           </a:xfrm>
           <a:prstGeom prst="rect">
@@ -17121,7 +17330,7 @@
         </p:nvSpPr>
         <p:spPr>
           <a:xfrm>
-            <a:off x="777240" y="6400800"/>
+            <a:off x="777240" y="6583680"/>
             <a:ext cx="7315200" cy="274320"/>
           </a:xfrm>
           <a:prstGeom prst="rect">
@@ -17160,7 +17369,7 @@
         </p:nvSpPr>
         <p:spPr>
           <a:xfrm>
-            <a:off x="11137392" y="6400800"/>
+            <a:off x="11137392" y="6583680"/>
             <a:ext cx="457200" cy="274320"/>
           </a:xfrm>
           <a:prstGeom prst="rect">
@@ -17330,6 +17539,10 @@
             <a:prstDash val="solid"/>
           </a:ln>
         </p:spPr>
+        <p:txBody>
+          <a:bodyPr/>
+          <a:p/>
+        </p:txBody>
       </p:sp>
       <p:sp>
         <p:nvSpPr>
@@ -17438,6 +17651,10 @@
             <a:prstDash val="solid"/>
           </a:ln>
         </p:spPr>
+        <p:txBody>
+          <a:bodyPr/>
+          <a:p/>
+        </p:txBody>
       </p:sp>
       <p:sp>
         <p:nvSpPr>
@@ -17546,6 +17763,10 @@
             <a:prstDash val="solid"/>
           </a:ln>
         </p:spPr>
+        <p:txBody>
+          <a:bodyPr/>
+          <a:p/>
+        </p:txBody>
       </p:sp>
       <p:sp>
         <p:nvSpPr>
@@ -17654,6 +17875,10 @@
             <a:prstDash val="solid"/>
           </a:ln>
         </p:spPr>
+        <p:txBody>
+          <a:bodyPr/>
+          <a:p/>
+        </p:txBody>
       </p:sp>
       <p:sp>
         <p:nvSpPr>
@@ -17762,6 +17987,10 @@
             <a:prstDash val="solid"/>
           </a:ln>
         </p:spPr>
+        <p:txBody>
+          <a:bodyPr/>
+          <a:p/>
+        </p:txBody>
       </p:sp>
       <p:sp>
         <p:nvSpPr>
@@ -17894,7 +18123,7 @@
         </p:nvSpPr>
         <p:spPr>
           <a:xfrm>
-            <a:off x="777240" y="6400800"/>
+            <a:off x="777240" y="6583680"/>
             <a:ext cx="7315200" cy="274320"/>
           </a:xfrm>
           <a:prstGeom prst="rect">
@@ -17933,7 +18162,7 @@
         </p:nvSpPr>
         <p:spPr>
           <a:xfrm>
-            <a:off x="11137392" y="6400800"/>
+            <a:off x="11137392" y="6583680"/>
             <a:ext cx="457200" cy="274320"/>
           </a:xfrm>
           <a:prstGeom prst="rect">
@@ -18103,6 +18332,10 @@
             <a:prstDash val="solid"/>
           </a:ln>
         </p:spPr>
+        <p:txBody>
+          <a:bodyPr/>
+          <a:p/>
+        </p:txBody>
       </p:sp>
       <p:sp>
         <p:nvSpPr>
@@ -18253,6 +18486,10 @@
             <a:prstDash val="solid"/>
           </a:ln>
         </p:spPr>
+        <p:txBody>
+          <a:bodyPr/>
+          <a:p/>
+        </p:txBody>
       </p:sp>
       <p:sp>
         <p:nvSpPr>
@@ -18427,7 +18664,7 @@
         </p:nvSpPr>
         <p:spPr>
           <a:xfrm>
-            <a:off x="777240" y="6400800"/>
+            <a:off x="777240" y="6583680"/>
             <a:ext cx="7315200" cy="274320"/>
           </a:xfrm>
           <a:prstGeom prst="rect">
@@ -18466,7 +18703,7 @@
         </p:nvSpPr>
         <p:spPr>
           <a:xfrm>
-            <a:off x="11137392" y="6400800"/>
+            <a:off x="11137392" y="6583680"/>
             <a:ext cx="457200" cy="274320"/>
           </a:xfrm>
           <a:prstGeom prst="rect">
@@ -18636,6 +18873,10 @@
             <a:prstDash val="solid"/>
           </a:ln>
         </p:spPr>
+        <p:txBody>
+          <a:bodyPr/>
+          <a:p/>
+        </p:txBody>
       </p:sp>
       <p:sp>
         <p:nvSpPr>
@@ -18744,6 +18985,10 @@
             <a:prstDash val="solid"/>
           </a:ln>
         </p:spPr>
+        <p:txBody>
+          <a:bodyPr/>
+          <a:p/>
+        </p:txBody>
       </p:sp>
       <p:sp>
         <p:nvSpPr>
@@ -18852,6 +19097,10 @@
             <a:prstDash val="solid"/>
           </a:ln>
         </p:spPr>
+        <p:txBody>
+          <a:bodyPr/>
+          <a:p/>
+        </p:txBody>
       </p:sp>
       <p:sp>
         <p:nvSpPr>
@@ -18960,6 +19209,10 @@
             <a:prstDash val="solid"/>
           </a:ln>
         </p:spPr>
+        <p:txBody>
+          <a:bodyPr/>
+          <a:p/>
+        </p:txBody>
       </p:sp>
       <p:sp>
         <p:nvSpPr>
@@ -19092,7 +19345,7 @@
         </p:nvSpPr>
         <p:spPr>
           <a:xfrm>
-            <a:off x="777240" y="6400800"/>
+            <a:off x="777240" y="6583680"/>
             <a:ext cx="7315200" cy="274320"/>
           </a:xfrm>
           <a:prstGeom prst="rect">
@@ -19131,7 +19384,7 @@
         </p:nvSpPr>
         <p:spPr>
           <a:xfrm>
-            <a:off x="11137392" y="6400800"/>
+            <a:off x="11137392" y="6583680"/>
             <a:ext cx="457200" cy="274320"/>
           </a:xfrm>
           <a:prstGeom prst="rect">
@@ -19301,6 +19554,10 @@
             <a:prstDash val="solid"/>
           </a:ln>
         </p:spPr>
+        <p:txBody>
+          <a:bodyPr/>
+          <a:p/>
+        </p:txBody>
       </p:sp>
       <p:sp>
         <p:nvSpPr>
@@ -19409,6 +19666,10 @@
             <a:prstDash val="solid"/>
           </a:ln>
         </p:spPr>
+        <p:txBody>
+          <a:bodyPr/>
+          <a:p/>
+        </p:txBody>
       </p:sp>
       <p:sp>
         <p:nvSpPr>
@@ -19517,6 +19778,10 @@
             <a:prstDash val="solid"/>
           </a:ln>
         </p:spPr>
+        <p:txBody>
+          <a:bodyPr/>
+          <a:p/>
+        </p:txBody>
       </p:sp>
       <p:sp>
         <p:nvSpPr>
@@ -19625,6 +19890,10 @@
             <a:prstDash val="solid"/>
           </a:ln>
         </p:spPr>
+        <p:txBody>
+          <a:bodyPr/>
+          <a:p/>
+        </p:txBody>
       </p:sp>
       <p:sp>
         <p:nvSpPr>
@@ -19733,6 +20002,10 @@
             <a:prstDash val="solid"/>
           </a:ln>
         </p:spPr>
+        <p:txBody>
+          <a:bodyPr/>
+          <a:p/>
+        </p:txBody>
       </p:sp>
       <p:sp>
         <p:nvSpPr>
@@ -19823,7 +20096,7 @@
         </p:nvSpPr>
         <p:spPr>
           <a:xfrm>
-            <a:off x="777240" y="5852160"/>
+            <a:off x="777240" y="5742432"/>
             <a:ext cx="10607040" cy="822960"/>
           </a:xfrm>
           <a:prstGeom prst="rect">
@@ -19865,7 +20138,7 @@
         </p:nvSpPr>
         <p:spPr>
           <a:xfrm>
-            <a:off x="777240" y="6400800"/>
+            <a:off x="777240" y="6583680"/>
             <a:ext cx="7315200" cy="274320"/>
           </a:xfrm>
           <a:prstGeom prst="rect">
@@ -19904,7 +20177,7 @@
         </p:nvSpPr>
         <p:spPr>
           <a:xfrm>
-            <a:off x="11137392" y="6400800"/>
+            <a:off x="11137392" y="6583680"/>
             <a:ext cx="457200" cy="274320"/>
           </a:xfrm>
           <a:prstGeom prst="rect">
@@ -20074,6 +20347,10 @@
             <a:prstDash val="solid"/>
           </a:ln>
         </p:spPr>
+        <p:txBody>
+          <a:bodyPr/>
+          <a:p/>
+        </p:txBody>
       </p:sp>
       <p:sp>
         <p:nvSpPr>
@@ -20224,6 +20501,10 @@
             <a:prstDash val="solid"/>
           </a:ln>
         </p:spPr>
+        <p:txBody>
+          <a:bodyPr/>
+          <a:p/>
+        </p:txBody>
       </p:sp>
       <p:sp>
         <p:nvSpPr>
@@ -20332,6 +20613,10 @@
             <a:prstDash val="solid"/>
           </a:ln>
         </p:spPr>
+        <p:txBody>
+          <a:bodyPr/>
+          <a:p/>
+        </p:txBody>
       </p:sp>
       <p:sp>
         <p:nvSpPr>
@@ -20440,6 +20725,10 @@
             <a:prstDash val="solid"/>
           </a:ln>
         </p:spPr>
+        <p:txBody>
+          <a:bodyPr/>
+          <a:p/>
+        </p:txBody>
       </p:sp>
       <p:sp>
         <p:nvSpPr>
@@ -20572,7 +20861,7 @@
         </p:nvSpPr>
         <p:spPr>
           <a:xfrm>
-            <a:off x="777240" y="6400800"/>
+            <a:off x="777240" y="6583680"/>
             <a:ext cx="7315200" cy="274320"/>
           </a:xfrm>
           <a:prstGeom prst="rect">
@@ -20611,7 +20900,7 @@
         </p:nvSpPr>
         <p:spPr>
           <a:xfrm>
-            <a:off x="11137392" y="6400800"/>
+            <a:off x="11137392" y="6583680"/>
             <a:ext cx="457200" cy="274320"/>
           </a:xfrm>
           <a:prstGeom prst="rect">
@@ -20904,6 +21193,10 @@
             <a:prstDash val="solid"/>
           </a:ln>
         </p:spPr>
+        <p:txBody>
+          <a:bodyPr/>
+          <a:p/>
+        </p:txBody>
       </p:sp>
       <p:sp>
         <p:nvSpPr>
@@ -21048,6 +21341,10 @@
             <a:prstDash val="solid"/>
           </a:ln>
         </p:spPr>
+        <p:txBody>
+          <a:bodyPr/>
+          <a:p/>
+        </p:txBody>
       </p:sp>
       <p:sp>
         <p:nvSpPr>
@@ -21192,6 +21489,10 @@
             <a:prstDash val="solid"/>
           </a:ln>
         </p:spPr>
+        <p:txBody>
+          <a:bodyPr/>
+          <a:p/>
+        </p:txBody>
       </p:sp>
       <p:sp>
         <p:nvSpPr>
@@ -21360,7 +21661,7 @@
         </p:nvSpPr>
         <p:spPr>
           <a:xfrm>
-            <a:off x="777240" y="6400800"/>
+            <a:off x="777240" y="6583680"/>
             <a:ext cx="7315200" cy="274320"/>
           </a:xfrm>
           <a:prstGeom prst="rect">
@@ -21399,7 +21700,7 @@
         </p:nvSpPr>
         <p:spPr>
           <a:xfrm>
-            <a:off x="11137392" y="6400800"/>
+            <a:off x="11137392" y="6583680"/>
             <a:ext cx="457200" cy="274320"/>
           </a:xfrm>
           <a:prstGeom prst="rect">
@@ -21605,6 +21906,10 @@
             <a:prstDash val="solid"/>
           </a:ln>
         </p:spPr>
+        <p:txBody>
+          <a:bodyPr/>
+          <a:p/>
+        </p:txBody>
       </p:sp>
       <p:sp>
         <p:nvSpPr>
@@ -21813,7 +22118,7 @@
         </p:nvSpPr>
         <p:spPr>
           <a:xfrm>
-            <a:off x="777240" y="6035040"/>
+            <a:off x="777240" y="5925312"/>
             <a:ext cx="10607040" cy="365760"/>
           </a:xfrm>
           <a:prstGeom prst="rect">
@@ -21855,7 +22160,7 @@
         </p:nvSpPr>
         <p:spPr>
           <a:xfrm>
-            <a:off x="777240" y="6400800"/>
+            <a:off x="777240" y="6583680"/>
             <a:ext cx="7315200" cy="274320"/>
           </a:xfrm>
           <a:prstGeom prst="rect">
@@ -21894,7 +22199,7 @@
         </p:nvSpPr>
         <p:spPr>
           <a:xfrm>
-            <a:off x="11137392" y="6400800"/>
+            <a:off x="11137392" y="6583680"/>
             <a:ext cx="457200" cy="274320"/>
           </a:xfrm>
           <a:prstGeom prst="rect">
@@ -22103,6 +22408,10 @@
             <a:prstDash val="solid"/>
           </a:ln>
         </p:spPr>
+        <p:txBody>
+          <a:bodyPr/>
+          <a:p/>
+        </p:txBody>
       </p:sp>
       <p:sp>
         <p:nvSpPr>
@@ -22325,6 +22634,10 @@
             <a:prstDash val="solid"/>
           </a:ln>
         </p:spPr>
+        <p:txBody>
+          <a:bodyPr/>
+          <a:p/>
+        </p:txBody>
       </p:sp>
       <p:sp>
         <p:nvSpPr>
@@ -22550,6 +22863,10 @@
             <a:prstDash val="solid"/>
           </a:ln>
         </p:spPr>
+        <p:txBody>
+          <a:bodyPr/>
+          <a:p/>
+        </p:txBody>
       </p:sp>
       <p:sp>
         <p:nvSpPr>
@@ -22775,6 +23092,10 @@
             <a:prstDash val="solid"/>
           </a:ln>
         </p:spPr>
+        <p:txBody>
+          <a:bodyPr/>
+          <a:p/>
+        </p:txBody>
       </p:sp>
       <p:sp>
         <p:nvSpPr>
@@ -23063,7 +23384,7 @@
         </p:nvSpPr>
         <p:spPr>
           <a:xfrm>
-            <a:off x="777240" y="6400800"/>
+            <a:off x="777240" y="6583680"/>
             <a:ext cx="7315200" cy="274320"/>
           </a:xfrm>
           <a:prstGeom prst="rect">
@@ -23102,7 +23423,7 @@
         </p:nvSpPr>
         <p:spPr>
           <a:xfrm>
-            <a:off x="11137392" y="6400800"/>
+            <a:off x="11137392" y="6583680"/>
             <a:ext cx="457200" cy="274320"/>
           </a:xfrm>
           <a:prstGeom prst="rect">
@@ -23272,6 +23593,10 @@
             <a:prstDash val="solid"/>
           </a:ln>
         </p:spPr>
+        <p:txBody>
+          <a:bodyPr/>
+          <a:p/>
+        </p:txBody>
       </p:sp>
       <p:sp>
         <p:nvSpPr>
@@ -23422,6 +23747,10 @@
             <a:prstDash val="solid"/>
           </a:ln>
         </p:spPr>
+        <p:txBody>
+          <a:bodyPr/>
+          <a:p/>
+        </p:txBody>
       </p:sp>
       <p:sp>
         <p:nvSpPr>
@@ -23554,7 +23883,7 @@
         </p:nvSpPr>
         <p:spPr>
           <a:xfrm>
-            <a:off x="777240" y="5806440"/>
+            <a:off x="777240" y="5760720"/>
             <a:ext cx="10607040" cy="822960"/>
           </a:xfrm>
           <a:prstGeom prst="rect">
@@ -23596,7 +23925,7 @@
         </p:nvSpPr>
         <p:spPr>
           <a:xfrm>
-            <a:off x="777240" y="6400800"/>
+            <a:off x="777240" y="6583680"/>
             <a:ext cx="7315200" cy="274320"/>
           </a:xfrm>
           <a:prstGeom prst="rect">
@@ -23635,7 +23964,7 @@
         </p:nvSpPr>
         <p:spPr>
           <a:xfrm>
-            <a:off x="11137392" y="6400800"/>
+            <a:off x="11137392" y="6583680"/>
             <a:ext cx="457200" cy="274320"/>
           </a:xfrm>
           <a:prstGeom prst="rect">
@@ -23863,6 +24192,10 @@
             <a:prstDash val="solid"/>
           </a:ln>
         </p:spPr>
+        <p:txBody>
+          <a:bodyPr/>
+          <a:p/>
+        </p:txBody>
       </p:sp>
       <p:sp>
         <p:nvSpPr>
@@ -23971,6 +24304,10 @@
             <a:prstDash val="solid"/>
           </a:ln>
         </p:spPr>
+        <p:txBody>
+          <a:bodyPr/>
+          <a:p/>
+        </p:txBody>
       </p:sp>
       <p:sp>
         <p:nvSpPr>
@@ -24079,6 +24416,10 @@
             <a:prstDash val="solid"/>
           </a:ln>
         </p:spPr>
+        <p:txBody>
+          <a:bodyPr/>
+          <a:p/>
+        </p:txBody>
       </p:sp>
       <p:sp>
         <p:nvSpPr>
@@ -24187,6 +24528,10 @@
             <a:prstDash val="solid"/>
           </a:ln>
         </p:spPr>
+        <p:txBody>
+          <a:bodyPr/>
+          <a:p/>
+        </p:txBody>
       </p:sp>
       <p:sp>
         <p:nvSpPr>
@@ -24277,7 +24622,7 @@
         </p:nvSpPr>
         <p:spPr>
           <a:xfrm>
-            <a:off x="777240" y="5760720"/>
+            <a:off x="777240" y="5650992"/>
             <a:ext cx="10607040" cy="822960"/>
           </a:xfrm>
           <a:prstGeom prst="rect">
@@ -24319,7 +24664,7 @@
         </p:nvSpPr>
         <p:spPr>
           <a:xfrm>
-            <a:off x="777240" y="6400800"/>
+            <a:off x="777240" y="6583680"/>
             <a:ext cx="7315200" cy="274320"/>
           </a:xfrm>
           <a:prstGeom prst="rect">
@@ -24358,7 +24703,7 @@
         </p:nvSpPr>
         <p:spPr>
           <a:xfrm>
-            <a:off x="11137392" y="6400800"/>
+            <a:off x="11137392" y="6583680"/>
             <a:ext cx="457200" cy="274320"/>
           </a:xfrm>
           <a:prstGeom prst="rect">
@@ -24528,6 +24873,10 @@
             <a:prstDash val="solid"/>
           </a:ln>
         </p:spPr>
+        <p:txBody>
+          <a:bodyPr/>
+          <a:p/>
+        </p:txBody>
       </p:sp>
       <p:sp>
         <p:nvSpPr>
@@ -24636,6 +24985,10 @@
             <a:prstDash val="solid"/>
           </a:ln>
         </p:spPr>
+        <p:txBody>
+          <a:bodyPr/>
+          <a:p/>
+        </p:txBody>
       </p:sp>
       <p:sp>
         <p:nvSpPr>
@@ -24744,6 +25097,10 @@
             <a:prstDash val="solid"/>
           </a:ln>
         </p:spPr>
+        <p:txBody>
+          <a:bodyPr/>
+          <a:p/>
+        </p:txBody>
       </p:sp>
       <p:sp>
         <p:nvSpPr>
@@ -24852,6 +25209,10 @@
             <a:prstDash val="solid"/>
           </a:ln>
         </p:spPr>
+        <p:txBody>
+          <a:bodyPr/>
+          <a:p/>
+        </p:txBody>
       </p:sp>
       <p:sp>
         <p:nvSpPr>
@@ -24960,6 +25321,10 @@
             <a:prstDash val="solid"/>
           </a:ln>
         </p:spPr>
+        <p:txBody>
+          <a:bodyPr/>
+          <a:p/>
+        </p:txBody>
       </p:sp>
       <p:sp>
         <p:nvSpPr>
@@ -25068,6 +25433,10 @@
             <a:prstDash val="solid"/>
           </a:ln>
         </p:spPr>
+        <p:txBody>
+          <a:bodyPr/>
+          <a:p/>
+        </p:txBody>
       </p:sp>
       <p:sp>
         <p:nvSpPr>
@@ -25176,6 +25545,10 @@
             <a:prstDash val="solid"/>
           </a:ln>
         </p:spPr>
+        <p:txBody>
+          <a:bodyPr/>
+          <a:p/>
+        </p:txBody>
       </p:sp>
       <p:sp>
         <p:nvSpPr>
@@ -25284,6 +25657,10 @@
             <a:prstDash val="solid"/>
           </a:ln>
         </p:spPr>
+        <p:txBody>
+          <a:bodyPr/>
+          <a:p/>
+        </p:txBody>
       </p:sp>
       <p:sp>
         <p:nvSpPr>
@@ -25497,7 +25874,7 @@
         </p:nvSpPr>
         <p:spPr>
           <a:xfrm>
-            <a:off x="777240" y="6400800"/>
+            <a:off x="777240" y="6583680"/>
             <a:ext cx="7315200" cy="274320"/>
           </a:xfrm>
           <a:prstGeom prst="rect">
@@ -25536,7 +25913,7 @@
         </p:nvSpPr>
         <p:spPr>
           <a:xfrm>
-            <a:off x="11137392" y="6400800"/>
+            <a:off x="11137392" y="6583680"/>
             <a:ext cx="457200" cy="274320"/>
           </a:xfrm>
           <a:prstGeom prst="rect">
@@ -25748,6 +26125,10 @@
             <a:prstDash val="solid"/>
           </a:ln>
         </p:spPr>
+        <p:txBody>
+          <a:bodyPr/>
+          <a:p/>
+        </p:txBody>
       </p:sp>
       <p:sp>
         <p:nvSpPr>
@@ -25895,6 +26276,10 @@
             <a:prstDash val="solid"/>
           </a:ln>
         </p:spPr>
+        <p:txBody>
+          <a:bodyPr/>
+          <a:p/>
+        </p:txBody>
       </p:sp>
       <p:sp>
         <p:nvSpPr>
@@ -26042,6 +26427,10 @@
             <a:prstDash val="solid"/>
           </a:ln>
         </p:spPr>
+        <p:txBody>
+          <a:bodyPr/>
+          <a:p/>
+        </p:txBody>
       </p:sp>
       <p:sp>
         <p:nvSpPr>
@@ -26189,6 +26578,10 @@
             <a:prstDash val="solid"/>
           </a:ln>
         </p:spPr>
+        <p:txBody>
+          <a:bodyPr/>
+          <a:p/>
+        </p:txBody>
       </p:sp>
       <p:sp>
         <p:nvSpPr>
@@ -26336,6 +26729,10 @@
             <a:prstDash val="solid"/>
           </a:ln>
         </p:spPr>
+        <p:txBody>
+          <a:bodyPr/>
+          <a:p/>
+        </p:txBody>
       </p:sp>
       <p:sp>
         <p:nvSpPr>
@@ -26465,7 +26862,7 @@
         </p:nvSpPr>
         <p:spPr>
           <a:xfrm>
-            <a:off x="777240" y="6400800"/>
+            <a:off x="777240" y="6583680"/>
             <a:ext cx="7315200" cy="274320"/>
           </a:xfrm>
           <a:prstGeom prst="rect">
@@ -26504,7 +26901,7 @@
         </p:nvSpPr>
         <p:spPr>
           <a:xfrm>
-            <a:off x="11137392" y="6400800"/>
+            <a:off x="11137392" y="6583680"/>
             <a:ext cx="457200" cy="274320"/>
           </a:xfrm>
           <a:prstGeom prst="rect">
@@ -26694,6 +27091,10 @@
             <a:prstDash val="solid"/>
           </a:ln>
         </p:spPr>
+        <p:txBody>
+          <a:bodyPr/>
+          <a:p/>
+        </p:txBody>
       </p:sp>
       <p:sp>
         <p:nvSpPr>
@@ -26878,6 +27279,10 @@
             <a:prstDash val="solid"/>
           </a:ln>
         </p:spPr>
+        <p:txBody>
+          <a:bodyPr/>
+          <a:p/>
+        </p:txBody>
       </p:sp>
       <p:sp>
         <p:nvSpPr>
@@ -27044,7 +27449,7 @@
         </p:nvSpPr>
         <p:spPr>
           <a:xfrm>
-            <a:off x="777240" y="5577840"/>
+            <a:off x="777240" y="5468112"/>
             <a:ext cx="10607040" cy="822960"/>
           </a:xfrm>
           <a:prstGeom prst="rect">
@@ -27086,7 +27491,7 @@
         </p:nvSpPr>
         <p:spPr>
           <a:xfrm>
-            <a:off x="777240" y="6400800"/>
+            <a:off x="777240" y="6583680"/>
             <a:ext cx="7315200" cy="274320"/>
           </a:xfrm>
           <a:prstGeom prst="rect">
@@ -27125,7 +27530,7 @@
         </p:nvSpPr>
         <p:spPr>
           <a:xfrm>
-            <a:off x="11137392" y="6400800"/>
+            <a:off x="11137392" y="6583680"/>
             <a:ext cx="457200" cy="274320"/>
           </a:xfrm>
           <a:prstGeom prst="rect">
@@ -27198,6 +27603,7 @@
         </p:nvPicPr>
         <p:blipFill>
           <a:blip r:embed="rId1"/>
+          <a:srcRect t="2000" b="53900"/>
           <a:stretch>
             <a:fillRect/>
           </a:stretch>
@@ -27233,6 +27639,10 @@
           </a:solidFill>
           <a:ln/>
         </p:spPr>
+        <p:txBody>
+          <a:bodyPr/>
+          <a:p/>
+        </p:txBody>
       </p:sp>
       <p:sp>
         <p:nvSpPr>
@@ -27255,6 +27665,10 @@
           </a:solidFill>
           <a:ln/>
         </p:spPr>
+        <p:txBody>
+          <a:bodyPr/>
+          <a:p/>
+        </p:txBody>
       </p:sp>
       <p:sp>
         <p:nvSpPr>
@@ -27425,6 +27839,10 @@
             <a:prstDash val="solid"/>
           </a:ln>
         </p:spPr>
+        <p:txBody>
+          <a:bodyPr/>
+          <a:p/>
+        </p:txBody>
       </p:sp>
       <p:sp>
         <p:nvSpPr>
@@ -27572,6 +27990,10 @@
             <a:prstDash val="solid"/>
           </a:ln>
         </p:spPr>
+        <p:txBody>
+          <a:bodyPr/>
+          <a:p/>
+        </p:txBody>
       </p:sp>
       <p:sp>
         <p:nvSpPr>
@@ -27719,6 +28141,10 @@
             <a:prstDash val="solid"/>
           </a:ln>
         </p:spPr>
+        <p:txBody>
+          <a:bodyPr/>
+          <a:p/>
+        </p:txBody>
       </p:sp>
       <p:sp>
         <p:nvSpPr>
@@ -27848,7 +28274,7 @@
         </p:nvSpPr>
         <p:spPr>
           <a:xfrm>
-            <a:off x="777240" y="5897880"/>
+            <a:off x="777240" y="5888736"/>
             <a:ext cx="10607040" cy="822960"/>
           </a:xfrm>
           <a:prstGeom prst="rect">
@@ -27890,7 +28316,7 @@
         </p:nvSpPr>
         <p:spPr>
           <a:xfrm>
-            <a:off x="777240" y="6400800"/>
+            <a:off x="777240" y="6583680"/>
             <a:ext cx="7315200" cy="274320"/>
           </a:xfrm>
           <a:prstGeom prst="rect">
@@ -27929,7 +28355,7 @@
         </p:nvSpPr>
         <p:spPr>
           <a:xfrm>
-            <a:off x="11137392" y="6400800"/>
+            <a:off x="11137392" y="6583680"/>
             <a:ext cx="457200" cy="274320"/>
           </a:xfrm>
           <a:prstGeom prst="rect">
@@ -28180,6 +28606,10 @@
             <a:prstDash val="solid"/>
           </a:ln>
         </p:spPr>
+        <p:txBody>
+          <a:bodyPr/>
+          <a:p/>
+        </p:txBody>
       </p:sp>
       <p:sp>
         <p:nvSpPr>
@@ -28327,6 +28757,10 @@
             <a:prstDash val="solid"/>
           </a:ln>
         </p:spPr>
+        <p:txBody>
+          <a:bodyPr/>
+          <a:p/>
+        </p:txBody>
       </p:sp>
       <p:sp>
         <p:nvSpPr>
@@ -28474,6 +28908,10 @@
             <a:prstDash val="solid"/>
           </a:ln>
         </p:spPr>
+        <p:txBody>
+          <a:bodyPr/>
+          <a:p/>
+        </p:txBody>
       </p:sp>
       <p:sp>
         <p:nvSpPr>
@@ -28621,6 +29059,10 @@
             <a:prstDash val="solid"/>
           </a:ln>
         </p:spPr>
+        <p:txBody>
+          <a:bodyPr/>
+          <a:p/>
+        </p:txBody>
       </p:sp>
       <p:sp>
         <p:nvSpPr>
@@ -28807,6 +29249,10 @@
             <a:prstDash val="solid"/>
           </a:ln>
         </p:spPr>
+        <p:txBody>
+          <a:bodyPr/>
+          <a:p/>
+        </p:txBody>
       </p:sp>
       <p:sp>
         <p:nvSpPr>
@@ -28873,6 +29319,10 @@
             <a:prstDash val="solid"/>
           </a:ln>
         </p:spPr>
+        <p:txBody>
+          <a:bodyPr/>
+          <a:p/>
+        </p:txBody>
       </p:sp>
       <p:sp>
         <p:nvSpPr>
@@ -28939,6 +29389,10 @@
             <a:prstDash val="solid"/>
           </a:ln>
         </p:spPr>
+        <p:txBody>
+          <a:bodyPr/>
+          <a:p/>
+        </p:txBody>
       </p:sp>
       <p:sp>
         <p:nvSpPr>
@@ -29005,6 +29459,10 @@
             <a:prstDash val="solid"/>
           </a:ln>
         </p:spPr>
+        <p:txBody>
+          <a:bodyPr/>
+          <a:p/>
+        </p:txBody>
       </p:sp>
       <p:sp>
         <p:nvSpPr>
@@ -29071,6 +29529,10 @@
             <a:prstDash val="solid"/>
           </a:ln>
         </p:spPr>
+        <p:txBody>
+          <a:bodyPr/>
+          <a:p/>
+        </p:txBody>
       </p:sp>
       <p:sp>
         <p:nvSpPr>
@@ -29161,7 +29623,7 @@
         </p:nvSpPr>
         <p:spPr>
           <a:xfrm>
-            <a:off x="777240" y="6400800"/>
+            <a:off x="777240" y="6583680"/>
             <a:ext cx="7315200" cy="274320"/>
           </a:xfrm>
           <a:prstGeom prst="rect">
@@ -29200,7 +29662,7 @@
         </p:nvSpPr>
         <p:spPr>
           <a:xfrm>
-            <a:off x="11137392" y="6400800"/>
+            <a:off x="11137392" y="6583680"/>
             <a:ext cx="457200" cy="274320"/>
           </a:xfrm>
           <a:prstGeom prst="rect">
@@ -29412,6 +29874,10 @@
             <a:prstDash val="solid"/>
           </a:ln>
         </p:spPr>
+        <p:txBody>
+          <a:bodyPr/>
+          <a:p/>
+        </p:txBody>
       </p:sp>
       <p:sp>
         <p:nvSpPr>
@@ -29559,6 +30025,10 @@
             <a:prstDash val="solid"/>
           </a:ln>
         </p:spPr>
+        <p:txBody>
+          <a:bodyPr/>
+          <a:p/>
+        </p:txBody>
       </p:sp>
       <p:sp>
         <p:nvSpPr>
@@ -29706,6 +30176,10 @@
             <a:prstDash val="solid"/>
           </a:ln>
         </p:spPr>
+        <p:txBody>
+          <a:bodyPr/>
+          <a:p/>
+        </p:txBody>
       </p:sp>
       <p:sp>
         <p:nvSpPr>
@@ -29853,6 +30327,10 @@
             <a:prstDash val="solid"/>
           </a:ln>
         </p:spPr>
+        <p:txBody>
+          <a:bodyPr/>
+          <a:p/>
+        </p:txBody>
       </p:sp>
       <p:sp>
         <p:nvSpPr>
@@ -30000,6 +30478,10 @@
             <a:prstDash val="solid"/>
           </a:ln>
         </p:spPr>
+        <p:txBody>
+          <a:bodyPr/>
+          <a:p/>
+        </p:txBody>
       </p:sp>
       <p:sp>
         <p:nvSpPr>
@@ -30147,6 +30629,10 @@
             <a:prstDash val="solid"/>
           </a:ln>
         </p:spPr>
+        <p:txBody>
+          <a:bodyPr/>
+          <a:p/>
+        </p:txBody>
       </p:sp>
       <p:sp>
         <p:nvSpPr>
@@ -30294,6 +30780,10 @@
             <a:prstDash val="solid"/>
           </a:ln>
         </p:spPr>
+        <p:txBody>
+          <a:bodyPr/>
+          <a:p/>
+        </p:txBody>
       </p:sp>
       <p:sp>
         <p:nvSpPr>
@@ -30465,7 +30955,7 @@
         </p:nvSpPr>
         <p:spPr>
           <a:xfrm>
-            <a:off x="777240" y="6400800"/>
+            <a:off x="777240" y="6583680"/>
             <a:ext cx="7315200" cy="274320"/>
           </a:xfrm>
           <a:prstGeom prst="rect">
@@ -30504,7 +30994,7 @@
         </p:nvSpPr>
         <p:spPr>
           <a:xfrm>
-            <a:off x="11137392" y="6400800"/>
+            <a:off x="11137392" y="6583680"/>
             <a:ext cx="457200" cy="274320"/>
           </a:xfrm>
           <a:prstGeom prst="rect">
@@ -30822,6 +31312,10 @@
             <a:prstDash val="solid"/>
           </a:ln>
         </p:spPr>
+        <p:txBody>
+          <a:bodyPr/>
+          <a:p/>
+        </p:txBody>
       </p:sp>
       <p:sp>
         <p:nvSpPr>
@@ -30966,6 +31460,10 @@
             <a:prstDash val="solid"/>
           </a:ln>
         </p:spPr>
+        <p:txBody>
+          <a:bodyPr/>
+          <a:p/>
+        </p:txBody>
       </p:sp>
       <p:sp>
         <p:nvSpPr>
@@ -31110,6 +31608,10 @@
             <a:prstDash val="solid"/>
           </a:ln>
         </p:spPr>
+        <p:txBody>
+          <a:bodyPr/>
+          <a:p/>
+        </p:txBody>
       </p:sp>
       <p:sp>
         <p:nvSpPr>
@@ -31254,6 +31756,10 @@
             <a:prstDash val="solid"/>
           </a:ln>
         </p:spPr>
+        <p:txBody>
+          <a:bodyPr/>
+          <a:p/>
+        </p:txBody>
       </p:sp>
       <p:sp>
         <p:nvSpPr>
@@ -31398,6 +31904,10 @@
             <a:prstDash val="solid"/>
           </a:ln>
         </p:spPr>
+        <p:txBody>
+          <a:bodyPr/>
+          <a:p/>
+        </p:txBody>
       </p:sp>
       <p:sp>
         <p:nvSpPr>
@@ -31542,6 +32052,10 @@
             <a:prstDash val="solid"/>
           </a:ln>
         </p:spPr>
+        <p:txBody>
+          <a:bodyPr/>
+          <a:p/>
+        </p:txBody>
       </p:sp>
       <p:sp>
         <p:nvSpPr>
@@ -31686,6 +32200,10 @@
             <a:prstDash val="solid"/>
           </a:ln>
         </p:spPr>
+        <p:txBody>
+          <a:bodyPr/>
+          <a:p/>
+        </p:txBody>
       </p:sp>
       <p:sp>
         <p:nvSpPr>
@@ -31830,6 +32348,10 @@
             <a:prstDash val="solid"/>
           </a:ln>
         </p:spPr>
+        <p:txBody>
+          <a:bodyPr/>
+          <a:p/>
+        </p:txBody>
       </p:sp>
       <p:sp>
         <p:nvSpPr>
@@ -31974,6 +32496,10 @@
             <a:prstDash val="solid"/>
           </a:ln>
         </p:spPr>
+        <p:txBody>
+          <a:bodyPr/>
+          <a:p/>
+        </p:txBody>
       </p:sp>
       <p:sp>
         <p:nvSpPr>
@@ -32100,7 +32626,7 @@
         </p:nvSpPr>
         <p:spPr>
           <a:xfrm>
-            <a:off x="777240" y="5989320"/>
+            <a:off x="777240" y="5907024"/>
             <a:ext cx="10607040" cy="822960"/>
           </a:xfrm>
           <a:prstGeom prst="rect">
@@ -32142,7 +32668,7 @@
         </p:nvSpPr>
         <p:spPr>
           <a:xfrm>
-            <a:off x="777240" y="6400800"/>
+            <a:off x="777240" y="6583680"/>
             <a:ext cx="7315200" cy="274320"/>
           </a:xfrm>
           <a:prstGeom prst="rect">
@@ -32181,7 +32707,7 @@
         </p:nvSpPr>
         <p:spPr>
           <a:xfrm>
-            <a:off x="11137392" y="6400800"/>
+            <a:off x="11137392" y="6583680"/>
             <a:ext cx="457200" cy="274320"/>
           </a:xfrm>
           <a:prstGeom prst="rect">
@@ -32371,6 +32897,10 @@
             <a:prstDash val="solid"/>
           </a:ln>
         </p:spPr>
+        <p:txBody>
+          <a:bodyPr/>
+          <a:p/>
+        </p:txBody>
       </p:sp>
       <p:sp>
         <p:nvSpPr>
@@ -32579,6 +33109,10 @@
             <a:prstDash val="solid"/>
           </a:ln>
         </p:spPr>
+        <p:txBody>
+          <a:bodyPr/>
+          <a:p/>
+        </p:txBody>
       </p:sp>
       <p:sp>
         <p:nvSpPr>
@@ -32769,7 +33303,7 @@
         </p:nvSpPr>
         <p:spPr>
           <a:xfrm>
-            <a:off x="777240" y="5623560"/>
+            <a:off x="777240" y="5577840"/>
             <a:ext cx="10607040" cy="822960"/>
           </a:xfrm>
           <a:prstGeom prst="rect">
@@ -32853,7 +33387,7 @@
         </p:nvSpPr>
         <p:spPr>
           <a:xfrm>
-            <a:off x="777240" y="6400800"/>
+            <a:off x="777240" y="6583680"/>
             <a:ext cx="7315200" cy="274320"/>
           </a:xfrm>
           <a:prstGeom prst="rect">
@@ -32892,7 +33426,7 @@
         </p:nvSpPr>
         <p:spPr>
           <a:xfrm>
-            <a:off x="11137392" y="6400800"/>
+            <a:off x="11137392" y="6583680"/>
             <a:ext cx="457200" cy="274320"/>
           </a:xfrm>
           <a:prstGeom prst="rect">
@@ -33062,6 +33596,10 @@
             <a:prstDash val="solid"/>
           </a:ln>
         </p:spPr>
+        <p:txBody>
+          <a:bodyPr/>
+          <a:p/>
+        </p:txBody>
       </p:sp>
       <p:sp>
         <p:nvSpPr>
@@ -33209,6 +33747,10 @@
             <a:prstDash val="solid"/>
           </a:ln>
         </p:spPr>
+        <p:txBody>
+          <a:bodyPr/>
+          <a:p/>
+        </p:txBody>
       </p:sp>
       <p:sp>
         <p:nvSpPr>
@@ -33356,6 +33898,10 @@
             <a:prstDash val="solid"/>
           </a:ln>
         </p:spPr>
+        <p:txBody>
+          <a:bodyPr/>
+          <a:p/>
+        </p:txBody>
       </p:sp>
       <p:sp>
         <p:nvSpPr>
@@ -33485,7 +34031,7 @@
         </p:nvSpPr>
         <p:spPr>
           <a:xfrm>
-            <a:off x="777240" y="5806440"/>
+            <a:off x="777240" y="5705856"/>
             <a:ext cx="10607040" cy="822960"/>
           </a:xfrm>
           <a:prstGeom prst="rect">
@@ -33527,7 +34073,7 @@
         </p:nvSpPr>
         <p:spPr>
           <a:xfrm>
-            <a:off x="777240" y="6400800"/>
+            <a:off x="777240" y="6583680"/>
             <a:ext cx="7315200" cy="274320"/>
           </a:xfrm>
           <a:prstGeom prst="rect">
@@ -33566,7 +34112,7 @@
         </p:nvSpPr>
         <p:spPr>
           <a:xfrm>
-            <a:off x="11137392" y="6400800"/>
+            <a:off x="11137392" y="6583680"/>
             <a:ext cx="457200" cy="274320"/>
           </a:xfrm>
           <a:prstGeom prst="rect">
@@ -33674,6 +34220,10 @@
           </a:solidFill>
           <a:ln/>
         </p:spPr>
+        <p:txBody>
+          <a:bodyPr/>
+          <a:p/>
+        </p:txBody>
       </p:sp>
       <p:sp>
         <p:nvSpPr>
@@ -33696,6 +34246,10 @@
           </a:solidFill>
           <a:ln/>
         </p:spPr>
+        <p:txBody>
+          <a:bodyPr/>
+          <a:p/>
+        </p:txBody>
       </p:sp>
       <p:sp>
         <p:nvSpPr>
@@ -33902,6 +34456,10 @@
             <a:prstDash val="solid"/>
           </a:ln>
         </p:spPr>
+        <p:txBody>
+          <a:bodyPr/>
+          <a:p/>
+        </p:txBody>
       </p:sp>
       <p:sp>
         <p:nvSpPr>
@@ -34084,6 +34642,10 @@
             <a:prstDash val="solid"/>
           </a:ln>
         </p:spPr>
+        <p:txBody>
+          <a:bodyPr/>
+          <a:p/>
+        </p:txBody>
       </p:sp>
       <p:sp>
         <p:nvSpPr>
@@ -34192,6 +34754,10 @@
             <a:prstDash val="solid"/>
           </a:ln>
         </p:spPr>
+        <p:txBody>
+          <a:bodyPr/>
+          <a:p/>
+        </p:txBody>
       </p:sp>
       <p:sp>
         <p:nvSpPr>
@@ -34300,6 +34866,10 @@
             <a:prstDash val="solid"/>
           </a:ln>
         </p:spPr>
+        <p:txBody>
+          <a:bodyPr/>
+          <a:p/>
+        </p:txBody>
       </p:sp>
       <p:sp>
         <p:nvSpPr>
@@ -34408,6 +34978,10 @@
             <a:prstDash val="solid"/>
           </a:ln>
         </p:spPr>
+        <p:txBody>
+          <a:bodyPr/>
+          <a:p/>
+        </p:txBody>
       </p:sp>
       <p:sp>
         <p:nvSpPr>
@@ -34516,6 +35090,10 @@
             <a:prstDash val="solid"/>
           </a:ln>
         </p:spPr>
+        <p:txBody>
+          <a:bodyPr/>
+          <a:p/>
+        </p:txBody>
       </p:sp>
       <p:sp>
         <p:nvSpPr>
@@ -34624,6 +35202,10 @@
             <a:prstDash val="solid"/>
           </a:ln>
         </p:spPr>
+        <p:txBody>
+          <a:bodyPr/>
+          <a:p/>
+        </p:txBody>
       </p:sp>
       <p:sp>
         <p:nvSpPr>
@@ -34732,6 +35314,10 @@
             <a:prstDash val="solid"/>
           </a:ln>
         </p:spPr>
+        <p:txBody>
+          <a:bodyPr/>
+          <a:p/>
+        </p:txBody>
       </p:sp>
       <p:sp>
         <p:nvSpPr>
@@ -34840,6 +35426,10 @@
             <a:prstDash val="solid"/>
           </a:ln>
         </p:spPr>
+        <p:txBody>
+          <a:bodyPr/>
+          <a:p/>
+        </p:txBody>
       </p:sp>
       <p:sp>
         <p:nvSpPr>
@@ -34948,6 +35538,10 @@
             <a:prstDash val="solid"/>
           </a:ln>
         </p:spPr>
+        <p:txBody>
+          <a:bodyPr/>
+          <a:p/>
+        </p:txBody>
       </p:sp>
       <p:sp>
         <p:nvSpPr>
@@ -35038,7 +35632,7 @@
         </p:nvSpPr>
         <p:spPr>
           <a:xfrm>
-            <a:off x="777240" y="6199632"/>
+            <a:off x="777240" y="6089904"/>
             <a:ext cx="10607040" cy="822960"/>
           </a:xfrm>
           <a:prstGeom prst="rect">
@@ -35080,7 +35674,7 @@
         </p:nvSpPr>
         <p:spPr>
           <a:xfrm>
-            <a:off x="777240" y="6400800"/>
+            <a:off x="777240" y="6583680"/>
             <a:ext cx="7315200" cy="274320"/>
           </a:xfrm>
           <a:prstGeom prst="rect">
@@ -35119,7 +35713,7 @@
         </p:nvSpPr>
         <p:spPr>
           <a:xfrm>
-            <a:off x="11137392" y="6400800"/>
+            <a:off x="11137392" y="6583680"/>
             <a:ext cx="457200" cy="274320"/>
           </a:xfrm>
           <a:prstGeom prst="rect">
@@ -35201,6 +35795,10 @@
           </a:solidFill>
           <a:ln/>
         </p:spPr>
+        <p:txBody>
+          <a:bodyPr/>
+          <a:p/>
+        </p:txBody>
       </p:sp>
       <p:sp>
         <p:nvSpPr>
@@ -35387,6 +35985,10 @@
             <a:prstDash val="solid"/>
           </a:ln>
         </p:spPr>
+        <p:txBody>
+          <a:bodyPr/>
+          <a:p/>
+        </p:txBody>
       </p:sp>
       <p:sp>
         <p:nvSpPr>
@@ -35670,6 +36272,10 @@
             <a:prstDash val="solid"/>
           </a:ln>
         </p:spPr>
+        <p:txBody>
+          <a:bodyPr/>
+          <a:p/>
+        </p:txBody>
       </p:sp>
       <p:sp>
         <p:nvSpPr>
@@ -35736,6 +36342,10 @@
             <a:prstDash val="solid"/>
           </a:ln>
         </p:spPr>
+        <p:txBody>
+          <a:bodyPr/>
+          <a:p/>
+        </p:txBody>
       </p:sp>
       <p:sp>
         <p:nvSpPr>
@@ -35802,6 +36412,10 @@
             <a:prstDash val="solid"/>
           </a:ln>
         </p:spPr>
+        <p:txBody>
+          <a:bodyPr/>
+          <a:p/>
+        </p:txBody>
       </p:sp>
       <p:sp>
         <p:nvSpPr>
@@ -35868,6 +36482,10 @@
             <a:prstDash val="solid"/>
           </a:ln>
         </p:spPr>
+        <p:txBody>
+          <a:bodyPr/>
+          <a:p/>
+        </p:txBody>
       </p:sp>
       <p:sp>
         <p:nvSpPr>
@@ -35934,6 +36552,10 @@
             <a:prstDash val="solid"/>
           </a:ln>
         </p:spPr>
+        <p:txBody>
+          <a:bodyPr/>
+          <a:p/>
+        </p:txBody>
       </p:sp>
       <p:sp>
         <p:nvSpPr>
@@ -36000,6 +36622,10 @@
             <a:prstDash val="solid"/>
           </a:ln>
         </p:spPr>
+        <p:txBody>
+          <a:bodyPr/>
+          <a:p/>
+        </p:txBody>
       </p:sp>
       <p:sp>
         <p:nvSpPr>
@@ -36048,7 +36674,7 @@
         </p:nvSpPr>
         <p:spPr>
           <a:xfrm>
-            <a:off x="777240" y="6400800"/>
+            <a:off x="777240" y="6583680"/>
             <a:ext cx="7315200" cy="274320"/>
           </a:xfrm>
           <a:prstGeom prst="rect">
@@ -36087,7 +36713,7 @@
         </p:nvSpPr>
         <p:spPr>
           <a:xfrm>
-            <a:off x="11137392" y="6400800"/>
+            <a:off x="11137392" y="6583680"/>
             <a:ext cx="457200" cy="274320"/>
           </a:xfrm>
           <a:prstGeom prst="rect">
@@ -36241,14 +36867,15 @@
         </p:nvPicPr>
         <p:blipFill>
           <a:blip r:embed="rId1"/>
+          <a:srcRect b="57240"/>
           <a:stretch>
             <a:fillRect/>
           </a:stretch>
         </p:blipFill>
         <p:spPr>
           <a:xfrm>
-            <a:off x="0" y="1965960"/>
-            <a:ext cx="12188952" cy="2194560"/>
+            <a:off x="0" y="2560320"/>
+            <a:ext cx="12188952" cy="1737360"/>
           </a:xfrm>
           <a:prstGeom prst="rect">
             <a:avLst/>
@@ -36263,8 +36890,8 @@
         </p:nvSpPr>
         <p:spPr>
           <a:xfrm>
-            <a:off x="0" y="1965960"/>
-            <a:ext cx="12188952" cy="2194560"/>
+            <a:off x="0" y="2560320"/>
+            <a:ext cx="12188952" cy="1737360"/>
           </a:xfrm>
           <a:prstGeom prst="rect">
             <a:avLst/>
@@ -36276,28 +36903,10 @@
           </a:solidFill>
           <a:ln/>
         </p:spPr>
-      </p:sp>
-      <p:sp>
-        <p:nvSpPr>
-          <p:cNvPr id="6" name="Shape 3"/>
-          <p:cNvSpPr/>
-          <p:nvPr/>
-        </p:nvSpPr>
-        <p:spPr>
-          <a:xfrm>
-            <a:off x="0" y="1965960"/>
-            <a:ext cx="12188952" cy="457200"/>
-          </a:xfrm>
-          <a:prstGeom prst="rect">
-            <a:avLst/>
-          </a:prstGeom>
-          <a:solidFill>
-            <a:srgbClr val="0F1420">
-              <a:alpha val="82000"/>
-            </a:srgbClr>
-          </a:solidFill>
-          <a:ln/>
-        </p:spPr>
+        <p:txBody>
+          <a:bodyPr/>
+          <a:p/>
+        </p:txBody>
       </p:sp>
       <p:sp>
         <p:nvSpPr>
@@ -36307,7 +36916,7 @@
         </p:nvSpPr>
         <p:spPr>
           <a:xfrm>
-            <a:off x="0" y="3703320"/>
+            <a:off x="0" y="3840480"/>
             <a:ext cx="12188952" cy="457200"/>
           </a:xfrm>
           <a:prstGeom prst="rect">
@@ -36320,6 +36929,10 @@
           </a:solidFill>
           <a:ln/>
         </p:spPr>
+        <p:txBody>
+          <a:bodyPr/>
+          <a:p/>
+        </p:txBody>
       </p:sp>
       <p:sp>
         <p:nvSpPr>
@@ -36329,7 +36942,7 @@
         </p:nvSpPr>
         <p:spPr>
           <a:xfrm>
-            <a:off x="777240" y="2194560"/>
+            <a:off x="777240" y="2057400"/>
             <a:ext cx="7315200" cy="365760"/>
           </a:xfrm>
           <a:prstGeom prst="rect">
@@ -36848,7 +37461,7 @@
         </p:nvSpPr>
         <p:spPr>
           <a:xfrm>
-            <a:off x="777240" y="5897880"/>
+            <a:off x="777240" y="5870448"/>
             <a:ext cx="10607040" cy="822960"/>
           </a:xfrm>
           <a:prstGeom prst="rect">
@@ -36890,7 +37503,7 @@
         </p:nvSpPr>
         <p:spPr>
           <a:xfrm>
-            <a:off x="777240" y="6400800"/>
+            <a:off x="777240" y="6583680"/>
             <a:ext cx="7315200" cy="274320"/>
           </a:xfrm>
           <a:prstGeom prst="rect">
@@ -36929,7 +37542,7 @@
         </p:nvSpPr>
         <p:spPr>
           <a:xfrm>
-            <a:off x="11137392" y="6400800"/>
+            <a:off x="11137392" y="6583680"/>
             <a:ext cx="457200" cy="274320"/>
           </a:xfrm>
           <a:prstGeom prst="rect">
@@ -37099,6 +37712,10 @@
             <a:prstDash val="solid"/>
           </a:ln>
         </p:spPr>
+        <p:txBody>
+          <a:bodyPr/>
+          <a:p/>
+        </p:txBody>
       </p:sp>
       <p:sp>
         <p:nvSpPr>
@@ -37288,6 +37905,10 @@
             <a:prstDash val="solid"/>
           </a:ln>
         </p:spPr>
+        <p:txBody>
+          <a:bodyPr/>
+          <a:p/>
+        </p:txBody>
       </p:sp>
       <p:sp>
         <p:nvSpPr>
@@ -37477,6 +38098,10 @@
             <a:prstDash val="solid"/>
           </a:ln>
         </p:spPr>
+        <p:txBody>
+          <a:bodyPr/>
+          <a:p/>
+        </p:txBody>
       </p:sp>
       <p:sp>
         <p:nvSpPr>
@@ -37732,7 +38357,7 @@
         </p:nvSpPr>
         <p:spPr>
           <a:xfrm>
-            <a:off x="777240" y="6400800"/>
+            <a:off x="777240" y="6583680"/>
             <a:ext cx="7315200" cy="274320"/>
           </a:xfrm>
           <a:prstGeom prst="rect">
@@ -37771,7 +38396,7 @@
         </p:nvSpPr>
         <p:spPr>
           <a:xfrm>
-            <a:off x="11137392" y="6400800"/>
+            <a:off x="11137392" y="6583680"/>
             <a:ext cx="457200" cy="274320"/>
           </a:xfrm>
           <a:prstGeom prst="rect">
@@ -37980,6 +38605,10 @@
             <a:prstDash val="solid"/>
           </a:ln>
         </p:spPr>
+        <p:txBody>
+          <a:bodyPr/>
+          <a:p/>
+        </p:txBody>
       </p:sp>
       <p:sp>
         <p:nvSpPr>
@@ -38088,6 +38717,10 @@
             <a:prstDash val="solid"/>
           </a:ln>
         </p:spPr>
+        <p:txBody>
+          <a:bodyPr/>
+          <a:p/>
+        </p:txBody>
       </p:sp>
       <p:sp>
         <p:nvSpPr>
@@ -38196,6 +38829,10 @@
             <a:prstDash val="solid"/>
           </a:ln>
         </p:spPr>
+        <p:txBody>
+          <a:bodyPr/>
+          <a:p/>
+        </p:txBody>
       </p:sp>
       <p:sp>
         <p:nvSpPr>
@@ -38343,6 +38980,10 @@
             <a:prstDash val="solid"/>
           </a:ln>
         </p:spPr>
+        <p:txBody>
+          <a:bodyPr/>
+          <a:p/>
+        </p:txBody>
       </p:sp>
       <p:sp>
         <p:nvSpPr>
@@ -38451,6 +39092,10 @@
             <a:prstDash val="solid"/>
           </a:ln>
         </p:spPr>
+        <p:txBody>
+          <a:bodyPr/>
+          <a:p/>
+        </p:txBody>
       </p:sp>
       <p:sp>
         <p:nvSpPr>
@@ -38559,6 +39204,10 @@
             <a:prstDash val="solid"/>
           </a:ln>
         </p:spPr>
+        <p:txBody>
+          <a:bodyPr/>
+          <a:p/>
+        </p:txBody>
       </p:sp>
       <p:sp>
         <p:nvSpPr>
@@ -38691,7 +39340,7 @@
         </p:nvSpPr>
         <p:spPr>
           <a:xfrm>
-            <a:off x="777240" y="6400800"/>
+            <a:off x="777240" y="6583680"/>
             <a:ext cx="7315200" cy="274320"/>
           </a:xfrm>
           <a:prstGeom prst="rect">
@@ -38730,7 +39379,7 @@
         </p:nvSpPr>
         <p:spPr>
           <a:xfrm>
-            <a:off x="11137392" y="6400800"/>
+            <a:off x="11137392" y="6583680"/>
             <a:ext cx="457200" cy="274320"/>
           </a:xfrm>
           <a:prstGeom prst="rect">
@@ -38900,6 +39549,10 @@
             <a:prstDash val="solid"/>
           </a:ln>
         </p:spPr>
+        <p:txBody>
+          <a:bodyPr/>
+          <a:p/>
+        </p:txBody>
       </p:sp>
       <p:sp>
         <p:nvSpPr>
@@ -38969,6 +39622,10 @@
             <a:prstDash val="solid"/>
           </a:ln>
         </p:spPr>
+        <p:txBody>
+          <a:bodyPr/>
+          <a:p/>
+        </p:txBody>
       </p:sp>
       <p:sp>
         <p:nvSpPr>
@@ -39038,6 +39695,10 @@
             <a:prstDash val="solid"/>
           </a:ln>
         </p:spPr>
+        <p:txBody>
+          <a:bodyPr/>
+          <a:p/>
+        </p:txBody>
       </p:sp>
       <p:sp>
         <p:nvSpPr>
@@ -39107,6 +39768,10 @@
             <a:prstDash val="solid"/>
           </a:ln>
         </p:spPr>
+        <p:txBody>
+          <a:bodyPr/>
+          <a:p/>
+        </p:txBody>
       </p:sp>
       <p:sp>
         <p:nvSpPr>
@@ -39176,6 +39841,10 @@
             <a:prstDash val="solid"/>
           </a:ln>
         </p:spPr>
+        <p:txBody>
+          <a:bodyPr/>
+          <a:p/>
+        </p:txBody>
       </p:sp>
       <p:sp>
         <p:nvSpPr>
@@ -39245,6 +39914,10 @@
             <a:prstDash val="solid"/>
           </a:ln>
         </p:spPr>
+        <p:txBody>
+          <a:bodyPr/>
+          <a:p/>
+        </p:txBody>
       </p:sp>
       <p:sp>
         <p:nvSpPr>
@@ -39314,6 +39987,10 @@
             <a:prstDash val="solid"/>
           </a:ln>
         </p:spPr>
+        <p:txBody>
+          <a:bodyPr/>
+          <a:p/>
+        </p:txBody>
       </p:sp>
       <p:sp>
         <p:nvSpPr>
@@ -39383,6 +40060,10 @@
             <a:prstDash val="solid"/>
           </a:ln>
         </p:spPr>
+        <p:txBody>
+          <a:bodyPr/>
+          <a:p/>
+        </p:txBody>
       </p:sp>
       <p:sp>
         <p:nvSpPr>
@@ -39452,6 +40133,10 @@
             <a:prstDash val="solid"/>
           </a:ln>
         </p:spPr>
+        <p:txBody>
+          <a:bodyPr/>
+          <a:p/>
+        </p:txBody>
       </p:sp>
       <p:sp>
         <p:nvSpPr>
@@ -39521,6 +40206,10 @@
             <a:prstDash val="solid"/>
           </a:ln>
         </p:spPr>
+        <p:txBody>
+          <a:bodyPr/>
+          <a:p/>
+        </p:txBody>
       </p:sp>
       <p:sp>
         <p:nvSpPr>
@@ -39590,6 +40279,10 @@
             <a:prstDash val="solid"/>
           </a:ln>
         </p:spPr>
+        <p:txBody>
+          <a:bodyPr/>
+          <a:p/>
+        </p:txBody>
       </p:sp>
       <p:sp>
         <p:nvSpPr>
@@ -39641,7 +40334,7 @@
         </p:nvSpPr>
         <p:spPr>
           <a:xfrm>
-            <a:off x="777240" y="5852160"/>
+            <a:off x="777240" y="5742432"/>
             <a:ext cx="10607040" cy="822960"/>
           </a:xfrm>
           <a:prstGeom prst="rect">
@@ -39683,7 +40376,7 @@
         </p:nvSpPr>
         <p:spPr>
           <a:xfrm>
-            <a:off x="777240" y="6400800"/>
+            <a:off x="777240" y="6583680"/>
             <a:ext cx="7315200" cy="274320"/>
           </a:xfrm>
           <a:prstGeom prst="rect">
@@ -39722,7 +40415,7 @@
         </p:nvSpPr>
         <p:spPr>
           <a:xfrm>
-            <a:off x="11137392" y="6400800"/>
+            <a:off x="11137392" y="6583680"/>
             <a:ext cx="457200" cy="274320"/>
           </a:xfrm>
           <a:prstGeom prst="rect">

--- a/docs/business/SafeRise-Investor-Deck.pptx
+++ b/docs/business/SafeRise-Investor-Deck.pptx
@@ -18412,7 +18412,7 @@
                 <a:ea typeface="Calibri" pitchFamily="34" charset="-122"/>
                 <a:cs typeface="Calibri" pitchFamily="34" charset="-120"/>
               </a:rPr>
-              <a:t>Elevation Series · Sex &amp; Intimacy · Fitness Mindset · Addiction Recovery · Nutrition &amp; Body · Money Mindset</a:t>
+              <a:t>Elevation Series · Sex &amp; Intimacy · Strength &amp; Return · Addiction Recovery · Embodied Nutrition · Money Mindset</a:t>
             </a:r>
             <a:endParaRPr lang="en-US" sz="1250" dirty="0"/>
           </a:p>
@@ -25625,7 +25625,7 @@
                 <a:ea typeface="Calibri" pitchFamily="34" charset="-122"/>
                 <a:cs typeface="Calibri" pitchFamily="34" charset="-120"/>
               </a:rPr>
-              <a:t>The remaining tracks — Sleep, Nutrition, Strength</a:t>
+              <a:t>Sleep &amp; Recovery, Embodied Nutrition, Strength &amp; Return</a:t>
             </a:r>
             <a:endParaRPr lang="en-US" sz="1000" dirty="0"/>
           </a:p>
@@ -30516,7 +30516,7 @@
                 <a:ea typeface="Cambria" pitchFamily="34" charset="-122"/>
                 <a:cs typeface="Cambria" pitchFamily="34" charset="-120"/>
               </a:rPr>
-              <a:t>Content — Sleep, Nutrition, Strength</a:t>
+              <a:t>Content — the three substrate tracks</a:t>
             </a:r>
             <a:endParaRPr lang="en-US" sz="1300" dirty="0"/>
           </a:p>
@@ -38343,7 +38343,7 @@
                 <a:ea typeface="Calibri" pitchFamily="34" charset="-122"/>
                 <a:cs typeface="Calibri" pitchFamily="34" charset="-120"/>
               </a:rPr>
-              <a:t>This is why Sleep, Nutrition and Strength are not adjacent markets. Without substrate there is no capacity, and the platform would be teaching people to regulate on an empty tank.</a:t>
+              <a:t>This is why Sleep &amp; Recovery, Embodied Nutrition and Strength &amp; Return are not adjacent markets. Without substrate there is no capacity, and the platform would be teaching people to regulate on an empty tank.</a:t>
             </a:r>
             <a:endParaRPr lang="en-US" sz="1200" dirty="0"/>
           </a:p>
